--- a/SDA-Pro-Presentation.pptx
+++ b/SDA-Pro-Presentation.pptx
@@ -4,6 +4,9 @@
   <p:sldMasterIdLst>
     <p:sldMasterId id="2147483648" r:id="rId1"/>
   </p:sldMasterIdLst>
+  <p:notesMasterIdLst>
+    <p:notesMasterId r:id="rId21"/>
+  </p:notesMasterIdLst>
   <p:sldIdLst>
     <p:sldId id="256" r:id="rId2"/>
     <p:sldId id="257" r:id="rId3"/>
@@ -25,10 +28,7 @@
     <p:sldId id="273" r:id="rId19"/>
     <p:sldId id="274" r:id="rId20"/>
   </p:sldIdLst>
-  <p:notesMasterIdLst>
-    <p:notesMasterId r:id="rId21"/>
-  </p:notesMasterIdLst>
-  <p:sldSz cx="9144000" cy="5143500"/>
+  <p:sldSz cx="9144000" cy="5143500" type="screen16x9"/>
   <p:notesSz cx="5143500" cy="9144000"/>
   <p:defaultTextStyle>
     <a:lvl1pPr marL="0" algn="l" defTabSz="914400" rtl="0" eaLnBrk="1" latinLnBrk="0" hangingPunct="1">
@@ -122,6 +122,11 @@
       </a:defRPr>
     </a:lvl9pPr>
   </p:defaultTextStyle>
+  <p:extLst>
+    <p:ext uri="{EFAFB233-063F-42B5-8137-9DF3F51BA10A}">
+      <p15:sldGuideLst xmlns:p15="http://schemas.microsoft.com/office/powerpoint/2012/main"/>
+    </p:ext>
+  </p:extLst>
 </p:presentation>
 </file>
 
@@ -147,234 +152,10 @@
           <a:chExt cx="0" cy="0"/>
         </a:xfrm>
       </p:grpSpPr>
-      <p:sp>
-        <p:nvSpPr>
-          <p:cNvPr id="2" name="Header Placeholder 1"/>
-          <p:cNvSpPr>
-            <a:spLocks noGrp="1"/>
-          </p:cNvSpPr>
-          <p:nvPr>
-            <p:ph type="hdr" sz="quarter"/>
-          </p:nvPr>
-        </p:nvSpPr>
-        <p:spPr>
-          <a:xfrm>
-            <a:off x="0" y="0"/>
-            <a:ext cx="2971800" cy="458788"/>
-          </a:xfrm>
-          <a:prstGeom prst="rect">
-            <a:avLst/>
-          </a:prstGeom>
-        </p:spPr>
-        <p:txBody>
-          <a:bodyPr vert="horz" lIns="91440" tIns="45720" rIns="91440" bIns="45720" rtlCol="0"/>
-          <a:lstStyle>
-            <a:lvl1pPr algn="l">
-              <a:defRPr sz="1200"/>
-            </a:lvl1pPr>
-          </a:lstStyle>
-          <a:p>
-            <a:endParaRPr lang="en-US"/>
-          </a:p>
-        </p:txBody>
-      </p:sp>
-      <p:sp>
-        <p:nvSpPr>
-          <p:cNvPr id="3" name="Date Placeholder 2"/>
-          <p:cNvSpPr>
-            <a:spLocks noGrp="1"/>
-          </p:cNvSpPr>
-          <p:nvPr>
-            <p:ph type="dt" idx="1"/>
-          </p:nvPr>
-        </p:nvSpPr>
-        <p:spPr>
-          <a:xfrm>
-            <a:off x="3884613" y="0"/>
-            <a:ext cx="2971800" cy="458788"/>
-          </a:xfrm>
-          <a:prstGeom prst="rect">
-            <a:avLst/>
-          </a:prstGeom>
-        </p:spPr>
-        <p:txBody>
-          <a:bodyPr vert="horz" lIns="91440" tIns="45720" rIns="91440" bIns="45720" rtlCol="0"/>
-          <a:lstStyle>
-            <a:lvl1pPr algn="r">
-              <a:defRPr sz="1200"/>
-            </a:lvl1pPr>
-          </a:lstStyle>
-          <a:p>
-            <a:fld id="{5282F153-3F37-0F45-9E97-73ACFA13230C}" type="datetimeFigureOut">
-              <a:rPr lang="en-US"/>
-              <a:t>7/23/19</a:t>
-            </a:fld>
-            <a:endParaRPr lang="en-US"/>
-          </a:p>
-        </p:txBody>
-      </p:sp>
-      <p:sp>
-        <p:nvSpPr>
-          <p:cNvPr id="4" name="Slide Image Placeholder 3"/>
-          <p:cNvSpPr>
-            <a:spLocks noGrp="1" noRot="1" noChangeAspect="1"/>
-          </p:cNvSpPr>
-          <p:nvPr>
-            <p:ph type="sldImg" idx="2"/>
-          </p:nvPr>
-        </p:nvSpPr>
-        <p:spPr>
-          <a:xfrm>
-            <a:off x="685800" y="1143000"/>
-            <a:ext cx="5486400" cy="3086100"/>
-          </a:xfrm>
-          <a:prstGeom prst="rect">
-            <a:avLst/>
-          </a:prstGeom>
-          <a:noFill/>
-          <a:ln w="12700">
-            <a:solidFill>
-              <a:prstClr val="black"/>
-            </a:solidFill>
-          </a:ln>
-        </p:spPr>
-        <p:txBody>
-          <a:bodyPr vert="horz" lIns="91440" tIns="45720" rIns="91440" bIns="45720" rtlCol="0" anchor="ctr"/>
-          <a:lstStyle/>
-          <a:p>
-            <a:endParaRPr lang="en-US"/>
-          </a:p>
-        </p:txBody>
-      </p:sp>
-      <p:sp>
-        <p:nvSpPr>
-          <p:cNvPr id="5" name="Notes Placeholder 4"/>
-          <p:cNvSpPr>
-            <a:spLocks noGrp="1"/>
-          </p:cNvSpPr>
-          <p:nvPr>
-            <p:ph type="body" sz="quarter" idx="3"/>
-          </p:nvPr>
-        </p:nvSpPr>
-        <p:spPr>
-          <a:xfrm>
-            <a:off x="685800" y="4400550"/>
-            <a:ext cx="5486400" cy="3600450"/>
-          </a:xfrm>
-          <a:prstGeom prst="rect">
-            <a:avLst/>
-          </a:prstGeom>
-        </p:spPr>
-        <p:txBody>
-          <a:bodyPr vert="horz" lIns="91440" tIns="45720" rIns="91440" bIns="45720" rtlCol="0"/>
-          <a:lstStyle/>
-          <a:p>
-            <a:pPr lvl="0"/>
-            <a:r>
-              <a:rPr lang="en-US"/>
-              <a:t>Click to edit Master text styles</a:t>
-            </a:r>
-          </a:p>
-          <a:p>
-            <a:pPr lvl="1"/>
-            <a:r>
-              <a:rPr lang="en-US"/>
-              <a:t>Second level</a:t>
-            </a:r>
-          </a:p>
-          <a:p>
-            <a:pPr lvl="2"/>
-            <a:r>
-              <a:rPr lang="en-US"/>
-              <a:t>Third level</a:t>
-            </a:r>
-          </a:p>
-          <a:p>
-            <a:pPr lvl="3"/>
-            <a:r>
-              <a:rPr lang="en-US"/>
-              <a:t>Fourth level</a:t>
-            </a:r>
-          </a:p>
-          <a:p>
-            <a:pPr lvl="4"/>
-            <a:r>
-              <a:rPr lang="en-US"/>
-              <a:t>Fifth level</a:t>
-            </a:r>
-          </a:p>
-        </p:txBody>
-      </p:sp>
-      <p:sp>
-        <p:nvSpPr>
-          <p:cNvPr id="6" name="Footer Placeholder 5"/>
-          <p:cNvSpPr>
-            <a:spLocks noGrp="1"/>
-          </p:cNvSpPr>
-          <p:nvPr>
-            <p:ph type="ftr" sz="quarter" idx="4"/>
-          </p:nvPr>
-        </p:nvSpPr>
-        <p:spPr>
-          <a:xfrm>
-            <a:off x="0" y="8685213"/>
-            <a:ext cx="2971800" cy="458787"/>
-          </a:xfrm>
-          <a:prstGeom prst="rect">
-            <a:avLst/>
-          </a:prstGeom>
-        </p:spPr>
-        <p:txBody>
-          <a:bodyPr vert="horz" lIns="91440" tIns="45720" rIns="91440" bIns="45720" rtlCol="0" anchor="b"/>
-          <a:lstStyle>
-            <a:lvl1pPr algn="l">
-              <a:defRPr sz="1200"/>
-            </a:lvl1pPr>
-          </a:lstStyle>
-          <a:p>
-            <a:endParaRPr lang="en-US"/>
-          </a:p>
-        </p:txBody>
-      </p:sp>
-      <p:sp>
-        <p:nvSpPr>
-          <p:cNvPr id="7" name="Slide Number Placeholder 6"/>
-          <p:cNvSpPr>
-            <a:spLocks noGrp="1"/>
-          </p:cNvSpPr>
-          <p:nvPr>
-            <p:ph type="sldNum" sz="quarter" idx="5"/>
-          </p:nvPr>
-        </p:nvSpPr>
-        <p:spPr>
-          <a:xfrm>
-            <a:off x="3884613" y="8685213"/>
-            <a:ext cx="2971800" cy="458787"/>
-          </a:xfrm>
-          <a:prstGeom prst="rect">
-            <a:avLst/>
-          </a:prstGeom>
-        </p:spPr>
-        <p:txBody>
-          <a:bodyPr vert="horz" lIns="91440" tIns="45720" rIns="91440" bIns="45720" rtlCol="0" anchor="b"/>
-          <a:lstStyle>
-            <a:lvl1pPr algn="r">
-              <a:defRPr sz="1200"/>
-            </a:lvl1pPr>
-          </a:lstStyle>
-          <a:p>
-            <a:fld id="{CE5E9CC1-C706-0F49-92D6-E571CC5EEA8F}" type="slidenum">
-              <a:rPr lang="en-US"/>
-              <a:t>‹#›</a:t>
-            </a:fld>
-            <a:endParaRPr lang="en-US"/>
-          </a:p>
-        </p:txBody>
-      </p:sp>
     </p:spTree>
     <p:extLst>
       <p:ext uri="{BB962C8B-B14F-4D97-AF65-F5344CB8AC3E}">
-        <p14:creationId xmlns:p14="http://schemas.microsoft.com/office/powerpoint/2010/main" val="1024086991"/>
+        <p14:creationId xmlns:p14="http://schemas.microsoft.com/office/powerpoint/2010/main" val="856158300"/>
       </p:ext>
     </p:extLst>
   </p:cSld>
@@ -518,10 +299,6 @@
           <a:bodyPr/>
           <a:lstStyle/>
           <a:p>
-            <a:r>
-              <a:rPr lang="en-US" dirty="0"/>
-              <a:t/>
-            </a:r>
             <a:endParaRPr lang="en-US" dirty="0"/>
           </a:p>
         </p:txBody>
@@ -606,10 +383,6 @@
           <a:bodyPr/>
           <a:lstStyle/>
           <a:p>
-            <a:r>
-              <a:rPr lang="en-US" dirty="0"/>
-              <a:t/>
-            </a:r>
             <a:endParaRPr lang="en-US" dirty="0"/>
           </a:p>
         </p:txBody>
@@ -694,10 +467,6 @@
           <a:bodyPr/>
           <a:lstStyle/>
           <a:p>
-            <a:r>
-              <a:rPr lang="en-US" dirty="0"/>
-              <a:t/>
-            </a:r>
             <a:endParaRPr lang="en-US" dirty="0"/>
           </a:p>
         </p:txBody>
@@ -782,10 +551,6 @@
           <a:bodyPr/>
           <a:lstStyle/>
           <a:p>
-            <a:r>
-              <a:rPr lang="en-US" dirty="0"/>
-              <a:t/>
-            </a:r>
             <a:endParaRPr lang="en-US" dirty="0"/>
           </a:p>
         </p:txBody>
@@ -870,10 +635,6 @@
           <a:bodyPr/>
           <a:lstStyle/>
           <a:p>
-            <a:r>
-              <a:rPr lang="en-US" dirty="0"/>
-              <a:t/>
-            </a:r>
             <a:endParaRPr lang="en-US" dirty="0"/>
           </a:p>
         </p:txBody>
@@ -958,10 +719,6 @@
           <a:bodyPr/>
           <a:lstStyle/>
           <a:p>
-            <a:r>
-              <a:rPr lang="en-US" dirty="0"/>
-              <a:t/>
-            </a:r>
             <a:endParaRPr lang="en-US" dirty="0"/>
           </a:p>
         </p:txBody>
@@ -1046,10 +803,6 @@
           <a:bodyPr/>
           <a:lstStyle/>
           <a:p>
-            <a:r>
-              <a:rPr lang="en-US" dirty="0"/>
-              <a:t/>
-            </a:r>
             <a:endParaRPr lang="en-US" dirty="0"/>
           </a:p>
         </p:txBody>
@@ -1134,10 +887,6 @@
           <a:bodyPr/>
           <a:lstStyle/>
           <a:p>
-            <a:r>
-              <a:rPr lang="en-US" dirty="0"/>
-              <a:t/>
-            </a:r>
             <a:endParaRPr lang="en-US" dirty="0"/>
           </a:p>
         </p:txBody>
@@ -1222,10 +971,6 @@
           <a:bodyPr/>
           <a:lstStyle/>
           <a:p>
-            <a:r>
-              <a:rPr lang="en-US" dirty="0"/>
-              <a:t/>
-            </a:r>
             <a:endParaRPr lang="en-US" dirty="0"/>
           </a:p>
         </p:txBody>
@@ -1310,10 +1055,6 @@
           <a:bodyPr/>
           <a:lstStyle/>
           <a:p>
-            <a:r>
-              <a:rPr lang="en-US" dirty="0"/>
-              <a:t/>
-            </a:r>
             <a:endParaRPr lang="en-US" dirty="0"/>
           </a:p>
         </p:txBody>
@@ -1398,10 +1139,6 @@
           <a:bodyPr/>
           <a:lstStyle/>
           <a:p>
-            <a:r>
-              <a:rPr lang="en-US" dirty="0"/>
-              <a:t/>
-            </a:r>
             <a:endParaRPr lang="en-US" dirty="0"/>
           </a:p>
         </p:txBody>
@@ -1486,10 +1223,6 @@
           <a:bodyPr/>
           <a:lstStyle/>
           <a:p>
-            <a:r>
-              <a:rPr lang="en-US" dirty="0"/>
-              <a:t/>
-            </a:r>
             <a:endParaRPr lang="en-US" dirty="0"/>
           </a:p>
         </p:txBody>
@@ -1574,10 +1307,6 @@
           <a:bodyPr/>
           <a:lstStyle/>
           <a:p>
-            <a:r>
-              <a:rPr lang="en-US" dirty="0"/>
-              <a:t/>
-            </a:r>
             <a:endParaRPr lang="en-US" dirty="0"/>
           </a:p>
         </p:txBody>
@@ -1662,10 +1391,6 @@
           <a:bodyPr/>
           <a:lstStyle/>
           <a:p>
-            <a:r>
-              <a:rPr lang="en-US" dirty="0"/>
-              <a:t/>
-            </a:r>
             <a:endParaRPr lang="en-US" dirty="0"/>
           </a:p>
         </p:txBody>
@@ -1750,10 +1475,6 @@
           <a:bodyPr/>
           <a:lstStyle/>
           <a:p>
-            <a:r>
-              <a:rPr lang="en-US" dirty="0"/>
-              <a:t/>
-            </a:r>
             <a:endParaRPr lang="en-US" dirty="0"/>
           </a:p>
         </p:txBody>
@@ -1838,10 +1559,6 @@
           <a:bodyPr/>
           <a:lstStyle/>
           <a:p>
-            <a:r>
-              <a:rPr lang="en-US" dirty="0"/>
-              <a:t/>
-            </a:r>
             <a:endParaRPr lang="en-US" dirty="0"/>
           </a:p>
         </p:txBody>
@@ -1926,10 +1643,6 @@
           <a:bodyPr/>
           <a:lstStyle/>
           <a:p>
-            <a:r>
-              <a:rPr lang="en-US" dirty="0"/>
-              <a:t/>
-            </a:r>
             <a:endParaRPr lang="en-US" dirty="0"/>
           </a:p>
         </p:txBody>
@@ -2014,10 +1727,6 @@
           <a:bodyPr/>
           <a:lstStyle/>
           <a:p>
-            <a:r>
-              <a:rPr lang="en-US" dirty="0"/>
-              <a:t/>
-            </a:r>
             <a:endParaRPr lang="en-US" dirty="0"/>
           </a:p>
         </p:txBody>
@@ -2102,10 +1811,6 @@
           <a:bodyPr/>
           <a:lstStyle/>
           <a:p>
-            <a:r>
-              <a:rPr lang="en-US" dirty="0"/>
-              <a:t/>
-            </a:r>
             <a:endParaRPr lang="en-US" dirty="0"/>
           </a:p>
         </p:txBody>
@@ -2179,6 +1884,11 @@
 <file path=ppt/slideMasters/slideMaster1.xml><?xml version="1.0" encoding="utf-8"?>
 <p:sldMaster xmlns:a="http://schemas.openxmlformats.org/drawingml/2006/main" xmlns:r="http://schemas.openxmlformats.org/officeDocument/2006/relationships" xmlns:p="http://schemas.openxmlformats.org/presentationml/2006/main">
   <p:cSld>
+    <p:bg>
+      <p:bgRef idx="1001">
+        <a:schemeClr val="bg1"/>
+      </p:bgRef>
+    </p:bg>
     <p:spTree>
       <p:nvGrpSpPr>
         <p:cNvPr id="1" name=""/>
@@ -2461,6 +2171,7 @@
         <a:solidFill>
           <a:srgbClr val="1E3A5F"/>
         </a:solidFill>
+        <a:effectLst/>
       </p:bgPr>
     </p:bg>
     <p:spTree>
@@ -2501,6 +2212,13 @@
             <a:prstDash val="solid"/>
           </a:ln>
         </p:spPr>
+        <p:txBody>
+          <a:bodyPr/>
+          <a:lstStyle/>
+          <a:p>
+            <a:endParaRPr lang="en-US"/>
+          </a:p>
+        </p:txBody>
       </p:sp>
       <p:sp>
         <p:nvSpPr>
@@ -2526,6 +2244,13 @@
             <a:prstDash val="solid"/>
           </a:ln>
         </p:spPr>
+        <p:txBody>
+          <a:bodyPr/>
+          <a:lstStyle/>
+          <a:p>
+            <a:endParaRPr lang="en-US"/>
+          </a:p>
+        </p:txBody>
       </p:sp>
       <p:sp>
         <p:nvSpPr>
@@ -2548,7 +2273,7 @@
           <a:bodyPr wrap="square" rtlCol="0" anchor="ctr"/>
           <a:lstStyle/>
           <a:p>
-            <a:pPr algn="l" indent="0" marL="0">
+            <a:pPr marL="0" indent="0" algn="l">
               <a:buNone/>
             </a:pPr>
             <a:r>
@@ -2587,7 +2312,7 @@
           <a:bodyPr wrap="square" rtlCol="0" anchor="ctr"/>
           <a:lstStyle/>
           <a:p>
-            <a:pPr algn="l" indent="0" marL="0">
+            <a:pPr marL="0" indent="0" algn="l">
               <a:buNone/>
             </a:pPr>
             <a:r>
@@ -2604,7 +2329,7 @@
             <a:endParaRPr lang="en-US" sz="2200" dirty="0"/>
           </a:p>
           <a:p>
-            <a:pPr algn="l" indent="0" marL="0">
+            <a:pPr marL="0" indent="0" algn="l">
               <a:buNone/>
             </a:pPr>
             <a:r>
@@ -2644,6 +2369,13 @@
             <a:prstDash val="solid"/>
           </a:ln>
         </p:spPr>
+        <p:txBody>
+          <a:bodyPr/>
+          <a:lstStyle/>
+          <a:p>
+            <a:endParaRPr lang="en-US"/>
+          </a:p>
+        </p:txBody>
       </p:sp>
       <p:sp>
         <p:nvSpPr>
@@ -2666,7 +2398,7 @@
           <a:bodyPr wrap="square" rtlCol="0" anchor="ctr"/>
           <a:lstStyle/>
           <a:p>
-            <a:pPr algn="l" indent="0" marL="0">
+            <a:pPr marL="0" indent="0" algn="l">
               <a:buNone/>
             </a:pPr>
             <a:r>
@@ -2705,7 +2437,7 @@
           <a:bodyPr wrap="square" rtlCol="0" anchor="ctr"/>
           <a:lstStyle/>
           <a:p>
-            <a:pPr algn="l" indent="0" marL="0">
+            <a:pPr marL="0" indent="0" algn="l">
               <a:buNone/>
             </a:pPr>
             <a:r>
@@ -2744,7 +2476,7 @@
           <a:bodyPr wrap="square" rtlCol="0" anchor="ctr"/>
           <a:lstStyle/>
           <a:p>
-            <a:pPr algn="l" indent="0" marL="0">
+            <a:pPr marL="0" indent="0" algn="l">
               <a:buNone/>
             </a:pPr>
             <a:r>
@@ -2756,7 +2488,29 @@
                 <a:ea typeface="Arial" pitchFamily="34" charset="-122"/>
                 <a:cs typeface="Arial" pitchFamily="34" charset="-120"/>
               </a:rPr>
-              <a:t>Submission: 29th May 2026</a:t>
+              <a:t>Submission: 3</a:t>
+            </a:r>
+            <a:r>
+              <a:rPr lang="en-US" sz="1300" baseline="30000" dirty="0">
+                <a:solidFill>
+                  <a:srgbClr val="AABBD0"/>
+                </a:solidFill>
+                <a:latin typeface="Arial" pitchFamily="34" charset="0"/>
+                <a:ea typeface="Arial" pitchFamily="34" charset="-122"/>
+                <a:cs typeface="Arial" pitchFamily="34" charset="-120"/>
+              </a:rPr>
+              <a:t>rd</a:t>
+            </a:r>
+            <a:r>
+              <a:rPr lang="en-US" sz="1300" dirty="0">
+                <a:solidFill>
+                  <a:srgbClr val="AABBD0"/>
+                </a:solidFill>
+                <a:latin typeface="Arial" pitchFamily="34" charset="0"/>
+                <a:ea typeface="Arial" pitchFamily="34" charset="-122"/>
+                <a:cs typeface="Arial" pitchFamily="34" charset="-120"/>
+              </a:rPr>
+              <a:t> June 2026</a:t>
             </a:r>
             <a:endParaRPr lang="en-US" sz="1300" dirty="0"/>
           </a:p>
@@ -2778,6 +2532,7 @@
         <a:solidFill>
           <a:srgbClr val="FFFFFF"/>
         </a:solidFill>
+        <a:effectLst/>
       </p:bgPr>
     </p:bg>
     <p:spTree>
@@ -2818,6 +2573,13 @@
             <a:prstDash val="solid"/>
           </a:ln>
         </p:spPr>
+        <p:txBody>
+          <a:bodyPr/>
+          <a:lstStyle/>
+          <a:p>
+            <a:endParaRPr lang="en-US"/>
+          </a:p>
+        </p:txBody>
       </p:sp>
       <p:sp>
         <p:nvSpPr>
@@ -2843,6 +2605,13 @@
             <a:prstDash val="solid"/>
           </a:ln>
         </p:spPr>
+        <p:txBody>
+          <a:bodyPr/>
+          <a:lstStyle/>
+          <a:p>
+            <a:endParaRPr lang="en-US"/>
+          </a:p>
+        </p:txBody>
       </p:sp>
       <p:sp>
         <p:nvSpPr>
@@ -2865,7 +2634,7 @@
           <a:bodyPr wrap="square" rtlCol="0" anchor="ctr"/>
           <a:lstStyle/>
           <a:p>
-            <a:pPr indent="0" marL="0">
+            <a:pPr marL="0" indent="0">
               <a:buNone/>
             </a:pPr>
             <a:r>
@@ -2904,7 +2673,7 @@
           <a:bodyPr wrap="square" rtlCol="0" anchor="ctr"/>
           <a:lstStyle/>
           <a:p>
-            <a:pPr algn="ctr" indent="0" marL="0">
+            <a:pPr marL="0" indent="0" algn="ctr">
               <a:buNone/>
             </a:pPr>
             <a:r>
@@ -2943,7 +2712,7 @@
           <a:bodyPr wrap="square" lIns="0" tIns="0" rIns="0" bIns="0" rtlCol="0" anchor="ctr"/>
           <a:lstStyle/>
           <a:p>
-            <a:pPr algn="l" indent="0" marL="0">
+            <a:pPr marL="0" indent="0" algn="l">
               <a:buNone/>
             </a:pPr>
             <a:r>
@@ -2985,13 +2754,20 @@
             <a:prstDash val="solid"/>
           </a:ln>
           <a:effectLst>
-            <a:outerShdw sx="100000" sy="100000" kx="0" ky="0" algn="bl" rotWithShape="0" blurRad="101600" dist="38100" dir="8100000">
+            <a:outerShdw blurRad="101600" dist="38100" dir="8100000" algn="bl" rotWithShape="0">
               <a:srgbClr val="000000">
                 <a:alpha val="18000"/>
               </a:srgbClr>
             </a:outerShdw>
           </a:effectLst>
         </p:spPr>
+        <p:txBody>
+          <a:bodyPr/>
+          <a:lstStyle/>
+          <a:p>
+            <a:endParaRPr lang="en-US"/>
+          </a:p>
+        </p:txBody>
       </p:sp>
       <p:sp>
         <p:nvSpPr>
@@ -3017,6 +2793,13 @@
             <a:prstDash val="solid"/>
           </a:ln>
         </p:spPr>
+        <p:txBody>
+          <a:bodyPr/>
+          <a:lstStyle/>
+          <a:p>
+            <a:endParaRPr lang="en-US"/>
+          </a:p>
+        </p:txBody>
       </p:sp>
       <p:sp>
         <p:nvSpPr>
@@ -3039,7 +2822,7 @@
           <a:bodyPr wrap="square" lIns="0" tIns="0" rIns="0" bIns="0" rtlCol="0" anchor="ctr"/>
           <a:lstStyle/>
           <a:p>
-            <a:pPr indent="0" marL="0">
+            <a:pPr marL="0" indent="0">
               <a:buNone/>
             </a:pPr>
             <a:r>
@@ -3078,7 +2861,7 @@
           <a:bodyPr wrap="square" lIns="0" tIns="0" rIns="0" bIns="0" rtlCol="0" anchor="ctr"/>
           <a:lstStyle/>
           <a:p>
-            <a:pPr indent="0" marL="0">
+            <a:pPr marL="0" indent="0">
               <a:buNone/>
             </a:pPr>
             <a:r>
@@ -3117,7 +2900,7 @@
           <a:bodyPr wrap="square" lIns="0" tIns="0" rIns="0" bIns="0" rtlCol="0" anchor="ctr"/>
           <a:lstStyle/>
           <a:p>
-            <a:pPr indent="0" marL="0">
+            <a:pPr marL="0" indent="0">
               <a:buNone/>
             </a:pPr>
             <a:r>
@@ -3159,13 +2942,20 @@
             <a:prstDash val="solid"/>
           </a:ln>
           <a:effectLst>
-            <a:outerShdw sx="100000" sy="100000" kx="0" ky="0" algn="bl" rotWithShape="0" blurRad="101600" dist="38100" dir="8100000">
+            <a:outerShdw blurRad="101600" dist="38100" dir="8100000" algn="bl" rotWithShape="0">
               <a:srgbClr val="000000">
                 <a:alpha val="18000"/>
               </a:srgbClr>
             </a:outerShdw>
           </a:effectLst>
         </p:spPr>
+        <p:txBody>
+          <a:bodyPr/>
+          <a:lstStyle/>
+          <a:p>
+            <a:endParaRPr lang="en-US"/>
+          </a:p>
+        </p:txBody>
       </p:sp>
       <p:sp>
         <p:nvSpPr>
@@ -3191,6 +2981,13 @@
             <a:prstDash val="solid"/>
           </a:ln>
         </p:spPr>
+        <p:txBody>
+          <a:bodyPr/>
+          <a:lstStyle/>
+          <a:p>
+            <a:endParaRPr lang="en-US"/>
+          </a:p>
+        </p:txBody>
       </p:sp>
       <p:sp>
         <p:nvSpPr>
@@ -3213,7 +3010,7 @@
           <a:bodyPr wrap="square" lIns="0" tIns="0" rIns="0" bIns="0" rtlCol="0" anchor="ctr"/>
           <a:lstStyle/>
           <a:p>
-            <a:pPr indent="0" marL="0">
+            <a:pPr marL="0" indent="0">
               <a:buNone/>
             </a:pPr>
             <a:r>
@@ -3252,7 +3049,7 @@
           <a:bodyPr wrap="square" lIns="0" tIns="0" rIns="0" bIns="0" rtlCol="0" anchor="ctr"/>
           <a:lstStyle/>
           <a:p>
-            <a:pPr indent="0" marL="0">
+            <a:pPr marL="0" indent="0">
               <a:buNone/>
             </a:pPr>
             <a:r>
@@ -3291,7 +3088,7 @@
           <a:bodyPr wrap="square" lIns="0" tIns="0" rIns="0" bIns="0" rtlCol="0" anchor="ctr"/>
           <a:lstStyle/>
           <a:p>
-            <a:pPr indent="0" marL="0">
+            <a:pPr marL="0" indent="0">
               <a:buNone/>
             </a:pPr>
             <a:r>
@@ -3333,13 +3130,20 @@
             <a:prstDash val="solid"/>
           </a:ln>
           <a:effectLst>
-            <a:outerShdw sx="100000" sy="100000" kx="0" ky="0" algn="bl" rotWithShape="0" blurRad="101600" dist="38100" dir="8100000">
+            <a:outerShdw blurRad="101600" dist="38100" dir="8100000" algn="bl" rotWithShape="0">
               <a:srgbClr val="000000">
                 <a:alpha val="18000"/>
               </a:srgbClr>
             </a:outerShdw>
           </a:effectLst>
         </p:spPr>
+        <p:txBody>
+          <a:bodyPr/>
+          <a:lstStyle/>
+          <a:p>
+            <a:endParaRPr lang="en-US"/>
+          </a:p>
+        </p:txBody>
       </p:sp>
       <p:sp>
         <p:nvSpPr>
@@ -3365,6 +3169,13 @@
             <a:prstDash val="solid"/>
           </a:ln>
         </p:spPr>
+        <p:txBody>
+          <a:bodyPr/>
+          <a:lstStyle/>
+          <a:p>
+            <a:endParaRPr lang="en-US"/>
+          </a:p>
+        </p:txBody>
       </p:sp>
       <p:sp>
         <p:nvSpPr>
@@ -3387,7 +3198,7 @@
           <a:bodyPr wrap="square" lIns="0" tIns="0" rIns="0" bIns="0" rtlCol="0" anchor="ctr"/>
           <a:lstStyle/>
           <a:p>
-            <a:pPr indent="0" marL="0">
+            <a:pPr marL="0" indent="0">
               <a:buNone/>
             </a:pPr>
             <a:r>
@@ -3426,7 +3237,7 @@
           <a:bodyPr wrap="square" lIns="0" tIns="0" rIns="0" bIns="0" rtlCol="0" anchor="ctr"/>
           <a:lstStyle/>
           <a:p>
-            <a:pPr indent="0" marL="0">
+            <a:pPr marL="0" indent="0">
               <a:buNone/>
             </a:pPr>
             <a:r>
@@ -3465,7 +3276,7 @@
           <a:bodyPr wrap="square" lIns="0" tIns="0" rIns="0" bIns="0" rtlCol="0" anchor="ctr"/>
           <a:lstStyle/>
           <a:p>
-            <a:pPr indent="0" marL="0">
+            <a:pPr marL="0" indent="0">
               <a:buNone/>
             </a:pPr>
             <a:r>
@@ -3499,6 +3310,7 @@
         <a:solidFill>
           <a:srgbClr val="FFFFFF"/>
         </a:solidFill>
+        <a:effectLst/>
       </p:bgPr>
     </p:bg>
     <p:spTree>
@@ -3539,6 +3351,13 @@
             <a:prstDash val="solid"/>
           </a:ln>
         </p:spPr>
+        <p:txBody>
+          <a:bodyPr/>
+          <a:lstStyle/>
+          <a:p>
+            <a:endParaRPr lang="en-US"/>
+          </a:p>
+        </p:txBody>
       </p:sp>
       <p:sp>
         <p:nvSpPr>
@@ -3564,6 +3383,13 @@
             <a:prstDash val="solid"/>
           </a:ln>
         </p:spPr>
+        <p:txBody>
+          <a:bodyPr/>
+          <a:lstStyle/>
+          <a:p>
+            <a:endParaRPr lang="en-US"/>
+          </a:p>
+        </p:txBody>
       </p:sp>
       <p:sp>
         <p:nvSpPr>
@@ -3586,7 +3412,7 @@
           <a:bodyPr wrap="square" rtlCol="0" anchor="ctr"/>
           <a:lstStyle/>
           <a:p>
-            <a:pPr indent="0" marL="0">
+            <a:pPr marL="0" indent="0">
               <a:buNone/>
             </a:pPr>
             <a:r>
@@ -3625,7 +3451,7 @@
           <a:bodyPr wrap="square" rtlCol="0" anchor="ctr"/>
           <a:lstStyle/>
           <a:p>
-            <a:pPr algn="ctr" indent="0" marL="0">
+            <a:pPr marL="0" indent="0" algn="ctr">
               <a:buNone/>
             </a:pPr>
             <a:r>
@@ -3664,7 +3490,7 @@
           <a:bodyPr wrap="square" lIns="0" tIns="0" rIns="0" bIns="0" rtlCol="0" anchor="ctr"/>
           <a:lstStyle/>
           <a:p>
-            <a:pPr algn="l" indent="0" marL="0">
+            <a:pPr marL="0" indent="0" algn="l">
               <a:buNone/>
             </a:pPr>
             <a:r>
@@ -3706,6 +3532,13 @@
             <a:prstDash val="solid"/>
           </a:ln>
         </p:spPr>
+        <p:txBody>
+          <a:bodyPr/>
+          <a:lstStyle/>
+          <a:p>
+            <a:endParaRPr lang="en-US"/>
+          </a:p>
+        </p:txBody>
       </p:sp>
       <p:sp>
         <p:nvSpPr>
@@ -3731,6 +3564,13 @@
             <a:prstDash val="solid"/>
           </a:ln>
         </p:spPr>
+        <p:txBody>
+          <a:bodyPr/>
+          <a:lstStyle/>
+          <a:p>
+            <a:endParaRPr lang="en-US"/>
+          </a:p>
+        </p:txBody>
       </p:sp>
       <p:sp>
         <p:nvSpPr>
@@ -3753,7 +3593,7 @@
           <a:bodyPr wrap="square" lIns="0" tIns="0" rIns="0" bIns="0" rtlCol="0" anchor="ctr"/>
           <a:lstStyle/>
           <a:p>
-            <a:pPr indent="0" marL="0">
+            <a:pPr marL="0" indent="0">
               <a:buNone/>
             </a:pPr>
             <a:r>
@@ -3792,7 +3632,7 @@
           <a:bodyPr wrap="square" lIns="0" tIns="0" rIns="0" bIns="0" rtlCol="0" anchor="ctr"/>
           <a:lstStyle/>
           <a:p>
-            <a:pPr indent="0" marL="0">
+            <a:pPr marL="0" indent="0">
               <a:buNone/>
             </a:pPr>
             <a:r>
@@ -3831,7 +3671,7 @@
           <a:bodyPr wrap="square" lIns="0" tIns="0" rIns="0" bIns="0" rtlCol="0" anchor="ctr"/>
           <a:lstStyle/>
           <a:p>
-            <a:pPr indent="0" marL="0">
+            <a:pPr marL="0" indent="0">
               <a:buNone/>
             </a:pPr>
             <a:r>
@@ -3873,6 +3713,13 @@
             <a:prstDash val="solid"/>
           </a:ln>
         </p:spPr>
+        <p:txBody>
+          <a:bodyPr/>
+          <a:lstStyle/>
+          <a:p>
+            <a:endParaRPr lang="en-US"/>
+          </a:p>
+        </p:txBody>
       </p:sp>
       <p:sp>
         <p:nvSpPr>
@@ -3898,6 +3745,13 @@
             <a:prstDash val="solid"/>
           </a:ln>
         </p:spPr>
+        <p:txBody>
+          <a:bodyPr/>
+          <a:lstStyle/>
+          <a:p>
+            <a:endParaRPr lang="en-US"/>
+          </a:p>
+        </p:txBody>
       </p:sp>
       <p:sp>
         <p:nvSpPr>
@@ -3920,7 +3774,7 @@
           <a:bodyPr wrap="square" lIns="0" tIns="0" rIns="0" bIns="0" rtlCol="0" anchor="ctr"/>
           <a:lstStyle/>
           <a:p>
-            <a:pPr indent="0" marL="0">
+            <a:pPr marL="0" indent="0">
               <a:buNone/>
             </a:pPr>
             <a:r>
@@ -3959,7 +3813,7 @@
           <a:bodyPr wrap="square" lIns="0" tIns="0" rIns="0" bIns="0" rtlCol="0" anchor="ctr"/>
           <a:lstStyle/>
           <a:p>
-            <a:pPr indent="0" marL="0">
+            <a:pPr marL="0" indent="0">
               <a:buNone/>
             </a:pPr>
             <a:r>
@@ -3998,7 +3852,7 @@
           <a:bodyPr wrap="square" lIns="0" tIns="0" rIns="0" bIns="0" rtlCol="0" anchor="ctr"/>
           <a:lstStyle/>
           <a:p>
-            <a:pPr indent="0" marL="0">
+            <a:pPr marL="0" indent="0">
               <a:buNone/>
             </a:pPr>
             <a:r>
@@ -4040,6 +3894,13 @@
             <a:prstDash val="solid"/>
           </a:ln>
         </p:spPr>
+        <p:txBody>
+          <a:bodyPr/>
+          <a:lstStyle/>
+          <a:p>
+            <a:endParaRPr lang="en-US"/>
+          </a:p>
+        </p:txBody>
       </p:sp>
       <p:sp>
         <p:nvSpPr>
@@ -4065,6 +3926,13 @@
             <a:prstDash val="solid"/>
           </a:ln>
         </p:spPr>
+        <p:txBody>
+          <a:bodyPr/>
+          <a:lstStyle/>
+          <a:p>
+            <a:endParaRPr lang="en-US"/>
+          </a:p>
+        </p:txBody>
       </p:sp>
       <p:sp>
         <p:nvSpPr>
@@ -4087,7 +3955,7 @@
           <a:bodyPr wrap="square" lIns="0" tIns="0" rIns="0" bIns="0" rtlCol="0" anchor="ctr"/>
           <a:lstStyle/>
           <a:p>
-            <a:pPr indent="0" marL="0">
+            <a:pPr marL="0" indent="0">
               <a:buNone/>
             </a:pPr>
             <a:r>
@@ -4126,7 +3994,7 @@
           <a:bodyPr wrap="square" lIns="0" tIns="0" rIns="0" bIns="0" rtlCol="0" anchor="ctr"/>
           <a:lstStyle/>
           <a:p>
-            <a:pPr indent="0" marL="0">
+            <a:pPr marL="0" indent="0">
               <a:buNone/>
             </a:pPr>
             <a:r>
@@ -4165,7 +4033,7 @@
           <a:bodyPr wrap="square" lIns="0" tIns="0" rIns="0" bIns="0" rtlCol="0" anchor="ctr"/>
           <a:lstStyle/>
           <a:p>
-            <a:pPr indent="0" marL="0">
+            <a:pPr marL="0" indent="0">
               <a:buNone/>
             </a:pPr>
             <a:r>
@@ -4207,6 +4075,13 @@
             <a:prstDash val="solid"/>
           </a:ln>
         </p:spPr>
+        <p:txBody>
+          <a:bodyPr/>
+          <a:lstStyle/>
+          <a:p>
+            <a:endParaRPr lang="en-US"/>
+          </a:p>
+        </p:txBody>
       </p:sp>
       <p:sp>
         <p:nvSpPr>
@@ -4232,6 +4107,13 @@
             <a:prstDash val="solid"/>
           </a:ln>
         </p:spPr>
+        <p:txBody>
+          <a:bodyPr/>
+          <a:lstStyle/>
+          <a:p>
+            <a:endParaRPr lang="en-US"/>
+          </a:p>
+        </p:txBody>
       </p:sp>
       <p:sp>
         <p:nvSpPr>
@@ -4254,7 +4136,7 @@
           <a:bodyPr wrap="square" lIns="0" tIns="0" rIns="0" bIns="0" rtlCol="0" anchor="ctr"/>
           <a:lstStyle/>
           <a:p>
-            <a:pPr indent="0" marL="0">
+            <a:pPr marL="0" indent="0">
               <a:buNone/>
             </a:pPr>
             <a:r>
@@ -4293,7 +4175,7 @@
           <a:bodyPr wrap="square" lIns="0" tIns="0" rIns="0" bIns="0" rtlCol="0" anchor="ctr"/>
           <a:lstStyle/>
           <a:p>
-            <a:pPr indent="0" marL="0">
+            <a:pPr marL="0" indent="0">
               <a:buNone/>
             </a:pPr>
             <a:r>
@@ -4332,7 +4214,7 @@
           <a:bodyPr wrap="square" lIns="0" tIns="0" rIns="0" bIns="0" rtlCol="0" anchor="ctr"/>
           <a:lstStyle/>
           <a:p>
-            <a:pPr indent="0" marL="0">
+            <a:pPr marL="0" indent="0">
               <a:buNone/>
             </a:pPr>
             <a:r>
@@ -4374,6 +4256,13 @@
             <a:prstDash val="solid"/>
           </a:ln>
         </p:spPr>
+        <p:txBody>
+          <a:bodyPr/>
+          <a:lstStyle/>
+          <a:p>
+            <a:endParaRPr lang="en-US"/>
+          </a:p>
+        </p:txBody>
       </p:sp>
       <p:sp>
         <p:nvSpPr>
@@ -4399,6 +4288,13 @@
             <a:prstDash val="solid"/>
           </a:ln>
         </p:spPr>
+        <p:txBody>
+          <a:bodyPr/>
+          <a:lstStyle/>
+          <a:p>
+            <a:endParaRPr lang="en-US"/>
+          </a:p>
+        </p:txBody>
       </p:sp>
       <p:sp>
         <p:nvSpPr>
@@ -4421,7 +4317,7 @@
           <a:bodyPr wrap="square" lIns="0" tIns="0" rIns="0" bIns="0" rtlCol="0" anchor="ctr"/>
           <a:lstStyle/>
           <a:p>
-            <a:pPr indent="0" marL="0">
+            <a:pPr marL="0" indent="0">
               <a:buNone/>
             </a:pPr>
             <a:r>
@@ -4460,7 +4356,7 @@
           <a:bodyPr wrap="square" lIns="0" tIns="0" rIns="0" bIns="0" rtlCol="0" anchor="ctr"/>
           <a:lstStyle/>
           <a:p>
-            <a:pPr indent="0" marL="0">
+            <a:pPr marL="0" indent="0">
               <a:buNone/>
             </a:pPr>
             <a:r>
@@ -4499,7 +4395,7 @@
           <a:bodyPr wrap="square" lIns="0" tIns="0" rIns="0" bIns="0" rtlCol="0" anchor="ctr"/>
           <a:lstStyle/>
           <a:p>
-            <a:pPr indent="0" marL="0">
+            <a:pPr marL="0" indent="0">
               <a:buNone/>
             </a:pPr>
             <a:r>
@@ -4533,6 +4429,7 @@
         <a:solidFill>
           <a:srgbClr val="FFFFFF"/>
         </a:solidFill>
+        <a:effectLst/>
       </p:bgPr>
     </p:bg>
     <p:spTree>
@@ -4573,6 +4470,13 @@
             <a:prstDash val="solid"/>
           </a:ln>
         </p:spPr>
+        <p:txBody>
+          <a:bodyPr/>
+          <a:lstStyle/>
+          <a:p>
+            <a:endParaRPr lang="en-US"/>
+          </a:p>
+        </p:txBody>
       </p:sp>
       <p:sp>
         <p:nvSpPr>
@@ -4598,6 +4502,13 @@
             <a:prstDash val="solid"/>
           </a:ln>
         </p:spPr>
+        <p:txBody>
+          <a:bodyPr/>
+          <a:lstStyle/>
+          <a:p>
+            <a:endParaRPr lang="en-US"/>
+          </a:p>
+        </p:txBody>
       </p:sp>
       <p:sp>
         <p:nvSpPr>
@@ -4620,7 +4531,7 @@
           <a:bodyPr wrap="square" rtlCol="0" anchor="ctr"/>
           <a:lstStyle/>
           <a:p>
-            <a:pPr indent="0" marL="0">
+            <a:pPr marL="0" indent="0">
               <a:buNone/>
             </a:pPr>
             <a:r>
@@ -4659,7 +4570,7 @@
           <a:bodyPr wrap="square" rtlCol="0" anchor="ctr"/>
           <a:lstStyle/>
           <a:p>
-            <a:pPr algn="ctr" indent="0" marL="0">
+            <a:pPr marL="0" indent="0" algn="ctr">
               <a:buNone/>
             </a:pPr>
             <a:r>
@@ -4698,7 +4609,7 @@
           <a:bodyPr wrap="square" lIns="0" tIns="0" rIns="0" bIns="0" rtlCol="0" anchor="ctr"/>
           <a:lstStyle/>
           <a:p>
-            <a:pPr algn="l" indent="0" marL="0">
+            <a:pPr marL="0" indent="0" algn="l">
               <a:buNone/>
             </a:pPr>
             <a:r>
@@ -4740,6 +4651,13 @@
             <a:prstDash val="solid"/>
           </a:ln>
         </p:spPr>
+        <p:txBody>
+          <a:bodyPr/>
+          <a:lstStyle/>
+          <a:p>
+            <a:endParaRPr lang="en-US"/>
+          </a:p>
+        </p:txBody>
       </p:sp>
       <p:sp>
         <p:nvSpPr>
@@ -4765,6 +4683,13 @@
             <a:prstDash val="solid"/>
           </a:ln>
         </p:spPr>
+        <p:txBody>
+          <a:bodyPr/>
+          <a:lstStyle/>
+          <a:p>
+            <a:endParaRPr lang="en-US"/>
+          </a:p>
+        </p:txBody>
       </p:sp>
       <p:sp>
         <p:nvSpPr>
@@ -4787,7 +4712,7 @@
           <a:bodyPr wrap="square" lIns="0" tIns="0" rIns="0" bIns="0" rtlCol="0" anchor="ctr"/>
           <a:lstStyle/>
           <a:p>
-            <a:pPr indent="0" marL="0">
+            <a:pPr marL="0" indent="0">
               <a:buNone/>
             </a:pPr>
             <a:r>
@@ -4826,7 +4751,7 @@
           <a:bodyPr wrap="square" lIns="0" tIns="0" rIns="0" bIns="0" rtlCol="0" anchor="ctr"/>
           <a:lstStyle/>
           <a:p>
-            <a:pPr indent="0" marL="0">
+            <a:pPr marL="0" indent="0">
               <a:buNone/>
             </a:pPr>
             <a:r>
@@ -4865,7 +4790,7 @@
           <a:bodyPr wrap="square" lIns="0" tIns="0" rIns="0" bIns="0" rtlCol="0" anchor="ctr"/>
           <a:lstStyle/>
           <a:p>
-            <a:pPr indent="0" marL="0">
+            <a:pPr marL="0" indent="0">
               <a:buNone/>
             </a:pPr>
             <a:r>
@@ -4907,6 +4832,13 @@
             <a:prstDash val="solid"/>
           </a:ln>
         </p:spPr>
+        <p:txBody>
+          <a:bodyPr/>
+          <a:lstStyle/>
+          <a:p>
+            <a:endParaRPr lang="en-US"/>
+          </a:p>
+        </p:txBody>
       </p:sp>
       <p:sp>
         <p:nvSpPr>
@@ -4932,6 +4864,13 @@
             <a:prstDash val="solid"/>
           </a:ln>
         </p:spPr>
+        <p:txBody>
+          <a:bodyPr/>
+          <a:lstStyle/>
+          <a:p>
+            <a:endParaRPr lang="en-US"/>
+          </a:p>
+        </p:txBody>
       </p:sp>
       <p:sp>
         <p:nvSpPr>
@@ -4954,7 +4893,7 @@
           <a:bodyPr wrap="square" lIns="0" tIns="0" rIns="0" bIns="0" rtlCol="0" anchor="ctr"/>
           <a:lstStyle/>
           <a:p>
-            <a:pPr indent="0" marL="0">
+            <a:pPr marL="0" indent="0">
               <a:buNone/>
             </a:pPr>
             <a:r>
@@ -4993,7 +4932,7 @@
           <a:bodyPr wrap="square" lIns="0" tIns="0" rIns="0" bIns="0" rtlCol="0" anchor="ctr"/>
           <a:lstStyle/>
           <a:p>
-            <a:pPr indent="0" marL="0">
+            <a:pPr marL="0" indent="0">
               <a:buNone/>
             </a:pPr>
             <a:r>
@@ -5032,7 +4971,7 @@
           <a:bodyPr wrap="square" lIns="0" tIns="0" rIns="0" bIns="0" rtlCol="0" anchor="ctr"/>
           <a:lstStyle/>
           <a:p>
-            <a:pPr indent="0" marL="0">
+            <a:pPr marL="0" indent="0">
               <a:buNone/>
             </a:pPr>
             <a:r>
@@ -5074,6 +5013,13 @@
             <a:prstDash val="solid"/>
           </a:ln>
         </p:spPr>
+        <p:txBody>
+          <a:bodyPr/>
+          <a:lstStyle/>
+          <a:p>
+            <a:endParaRPr lang="en-US"/>
+          </a:p>
+        </p:txBody>
       </p:sp>
       <p:sp>
         <p:nvSpPr>
@@ -5099,6 +5045,13 @@
             <a:prstDash val="solid"/>
           </a:ln>
         </p:spPr>
+        <p:txBody>
+          <a:bodyPr/>
+          <a:lstStyle/>
+          <a:p>
+            <a:endParaRPr lang="en-US"/>
+          </a:p>
+        </p:txBody>
       </p:sp>
       <p:sp>
         <p:nvSpPr>
@@ -5121,7 +5074,7 @@
           <a:bodyPr wrap="square" lIns="0" tIns="0" rIns="0" bIns="0" rtlCol="0" anchor="ctr"/>
           <a:lstStyle/>
           <a:p>
-            <a:pPr indent="0" marL="0">
+            <a:pPr marL="0" indent="0">
               <a:buNone/>
             </a:pPr>
             <a:r>
@@ -5160,7 +5113,7 @@
           <a:bodyPr wrap="square" lIns="0" tIns="0" rIns="0" bIns="0" rtlCol="0" anchor="ctr"/>
           <a:lstStyle/>
           <a:p>
-            <a:pPr indent="0" marL="0">
+            <a:pPr marL="0" indent="0">
               <a:buNone/>
             </a:pPr>
             <a:r>
@@ -5199,7 +5152,7 @@
           <a:bodyPr wrap="square" lIns="0" tIns="0" rIns="0" bIns="0" rtlCol="0" anchor="ctr"/>
           <a:lstStyle/>
           <a:p>
-            <a:pPr indent="0" marL="0">
+            <a:pPr marL="0" indent="0">
               <a:buNone/>
             </a:pPr>
             <a:r>
@@ -5241,6 +5194,13 @@
             <a:prstDash val="solid"/>
           </a:ln>
         </p:spPr>
+        <p:txBody>
+          <a:bodyPr/>
+          <a:lstStyle/>
+          <a:p>
+            <a:endParaRPr lang="en-US"/>
+          </a:p>
+        </p:txBody>
       </p:sp>
       <p:sp>
         <p:nvSpPr>
@@ -5266,6 +5226,13 @@
             <a:prstDash val="solid"/>
           </a:ln>
         </p:spPr>
+        <p:txBody>
+          <a:bodyPr/>
+          <a:lstStyle/>
+          <a:p>
+            <a:endParaRPr lang="en-US"/>
+          </a:p>
+        </p:txBody>
       </p:sp>
       <p:sp>
         <p:nvSpPr>
@@ -5288,7 +5255,7 @@
           <a:bodyPr wrap="square" lIns="0" tIns="0" rIns="0" bIns="0" rtlCol="0" anchor="ctr"/>
           <a:lstStyle/>
           <a:p>
-            <a:pPr indent="0" marL="0">
+            <a:pPr marL="0" indent="0">
               <a:buNone/>
             </a:pPr>
             <a:r>
@@ -5327,7 +5294,7 @@
           <a:bodyPr wrap="square" lIns="0" tIns="0" rIns="0" bIns="0" rtlCol="0" anchor="ctr"/>
           <a:lstStyle/>
           <a:p>
-            <a:pPr indent="0" marL="0">
+            <a:pPr marL="0" indent="0">
               <a:buNone/>
             </a:pPr>
             <a:r>
@@ -5366,7 +5333,7 @@
           <a:bodyPr wrap="square" lIns="0" tIns="0" rIns="0" bIns="0" rtlCol="0" anchor="ctr"/>
           <a:lstStyle/>
           <a:p>
-            <a:pPr indent="0" marL="0">
+            <a:pPr marL="0" indent="0">
               <a:buNone/>
             </a:pPr>
             <a:r>
@@ -5400,6 +5367,7 @@
         <a:solidFill>
           <a:srgbClr val="1E3A5F"/>
         </a:solidFill>
+        <a:effectLst/>
       </p:bgPr>
     </p:bg>
     <p:spTree>
@@ -5440,6 +5408,13 @@
             <a:prstDash val="solid"/>
           </a:ln>
         </p:spPr>
+        <p:txBody>
+          <a:bodyPr/>
+          <a:lstStyle/>
+          <a:p>
+            <a:endParaRPr lang="en-US"/>
+          </a:p>
+        </p:txBody>
       </p:sp>
       <p:sp>
         <p:nvSpPr>
@@ -5462,7 +5437,7 @@
           <a:bodyPr wrap="square" rtlCol="0" anchor="ctr"/>
           <a:lstStyle/>
           <a:p>
-            <a:pPr algn="l" indent="0" marL="0">
+            <a:pPr marL="0" indent="0" algn="l">
               <a:buNone/>
             </a:pPr>
             <a:r>
@@ -5501,7 +5476,7 @@
           <a:bodyPr wrap="square" rtlCol="0" anchor="ctr"/>
           <a:lstStyle/>
           <a:p>
-            <a:pPr algn="l" indent="0" marL="0">
+            <a:pPr marL="0" indent="0" algn="l">
               <a:buNone/>
             </a:pPr>
             <a:r>
@@ -5535,6 +5510,7 @@
         <a:solidFill>
           <a:srgbClr val="FFFFFF"/>
         </a:solidFill>
+        <a:effectLst/>
       </p:bgPr>
     </p:bg>
     <p:spTree>
@@ -5575,6 +5551,13 @@
             <a:prstDash val="solid"/>
           </a:ln>
         </p:spPr>
+        <p:txBody>
+          <a:bodyPr/>
+          <a:lstStyle/>
+          <a:p>
+            <a:endParaRPr lang="en-US"/>
+          </a:p>
+        </p:txBody>
       </p:sp>
       <p:sp>
         <p:nvSpPr>
@@ -5600,6 +5583,13 @@
             <a:prstDash val="solid"/>
           </a:ln>
         </p:spPr>
+        <p:txBody>
+          <a:bodyPr/>
+          <a:lstStyle/>
+          <a:p>
+            <a:endParaRPr lang="en-US"/>
+          </a:p>
+        </p:txBody>
       </p:sp>
       <p:sp>
         <p:nvSpPr>
@@ -5622,7 +5612,7 @@
           <a:bodyPr wrap="square" rtlCol="0" anchor="ctr"/>
           <a:lstStyle/>
           <a:p>
-            <a:pPr indent="0" marL="0">
+            <a:pPr marL="0" indent="0">
               <a:buNone/>
             </a:pPr>
             <a:r>
@@ -5661,7 +5651,7 @@
           <a:bodyPr wrap="square" rtlCol="0" anchor="ctr"/>
           <a:lstStyle/>
           <a:p>
-            <a:pPr algn="ctr" indent="0" marL="0">
+            <a:pPr marL="0" indent="0" algn="ctr">
               <a:buNone/>
             </a:pPr>
             <a:r>
@@ -5700,7 +5690,7 @@
           <a:bodyPr wrap="square" lIns="0" tIns="0" rIns="0" bIns="0" rtlCol="0" anchor="ctr"/>
           <a:lstStyle/>
           <a:p>
-            <a:pPr algn="l" indent="0" marL="0">
+            <a:pPr marL="0" indent="0" algn="l">
               <a:buNone/>
             </a:pPr>
             <a:r>
@@ -5742,13 +5732,20 @@
             <a:prstDash val="solid"/>
           </a:ln>
           <a:effectLst>
-            <a:outerShdw sx="100000" sy="100000" kx="0" ky="0" algn="bl" rotWithShape="0" blurRad="101600" dist="38100" dir="8100000">
+            <a:outerShdw blurRad="101600" dist="38100" dir="8100000" algn="bl" rotWithShape="0">
               <a:srgbClr val="000000">
                 <a:alpha val="18000"/>
               </a:srgbClr>
             </a:outerShdw>
           </a:effectLst>
         </p:spPr>
+        <p:txBody>
+          <a:bodyPr/>
+          <a:lstStyle/>
+          <a:p>
+            <a:endParaRPr lang="en-US"/>
+          </a:p>
+        </p:txBody>
       </p:sp>
       <p:sp>
         <p:nvSpPr>
@@ -5774,6 +5771,13 @@
             <a:prstDash val="solid"/>
           </a:ln>
         </p:spPr>
+        <p:txBody>
+          <a:bodyPr/>
+          <a:lstStyle/>
+          <a:p>
+            <a:endParaRPr lang="en-US"/>
+          </a:p>
+        </p:txBody>
       </p:sp>
       <p:sp>
         <p:nvSpPr>
@@ -5796,7 +5800,7 @@
           <a:bodyPr wrap="square" lIns="0" tIns="0" rIns="0" bIns="0" rtlCol="0" anchor="ctr"/>
           <a:lstStyle/>
           <a:p>
-            <a:pPr algn="ctr" indent="0" marL="0">
+            <a:pPr marL="0" indent="0" algn="ctr">
               <a:buNone/>
             </a:pPr>
             <a:r>
@@ -5835,7 +5839,7 @@
           <a:bodyPr wrap="square" lIns="0" tIns="0" rIns="0" bIns="0" rtlCol="0" anchor="ctr"/>
           <a:lstStyle/>
           <a:p>
-            <a:pPr indent="0" marL="0">
+            <a:pPr marL="0" indent="0">
               <a:buNone/>
             </a:pPr>
             <a:r>
@@ -5874,7 +5878,7 @@
           <a:bodyPr wrap="square" lIns="0" tIns="0" rIns="0" bIns="0" rtlCol="0" anchor="ctr"/>
           <a:lstStyle/>
           <a:p>
-            <a:pPr indent="0" marL="0">
+            <a:pPr marL="0" indent="0">
               <a:buNone/>
             </a:pPr>
             <a:r>
@@ -5916,13 +5920,20 @@
             <a:prstDash val="solid"/>
           </a:ln>
           <a:effectLst>
-            <a:outerShdw sx="100000" sy="100000" kx="0" ky="0" algn="bl" rotWithShape="0" blurRad="101600" dist="38100" dir="8100000">
+            <a:outerShdw blurRad="101600" dist="38100" dir="8100000" algn="bl" rotWithShape="0">
               <a:srgbClr val="000000">
                 <a:alpha val="18000"/>
               </a:srgbClr>
             </a:outerShdw>
           </a:effectLst>
         </p:spPr>
+        <p:txBody>
+          <a:bodyPr/>
+          <a:lstStyle/>
+          <a:p>
+            <a:endParaRPr lang="en-US"/>
+          </a:p>
+        </p:txBody>
       </p:sp>
       <p:sp>
         <p:nvSpPr>
@@ -5948,6 +5959,13 @@
             <a:prstDash val="solid"/>
           </a:ln>
         </p:spPr>
+        <p:txBody>
+          <a:bodyPr/>
+          <a:lstStyle/>
+          <a:p>
+            <a:endParaRPr lang="en-US"/>
+          </a:p>
+        </p:txBody>
       </p:sp>
       <p:sp>
         <p:nvSpPr>
@@ -5970,7 +5988,7 @@
           <a:bodyPr wrap="square" lIns="0" tIns="0" rIns="0" bIns="0" rtlCol="0" anchor="ctr"/>
           <a:lstStyle/>
           <a:p>
-            <a:pPr algn="ctr" indent="0" marL="0">
+            <a:pPr marL="0" indent="0" algn="ctr">
               <a:buNone/>
             </a:pPr>
             <a:r>
@@ -6009,7 +6027,7 @@
           <a:bodyPr wrap="square" lIns="0" tIns="0" rIns="0" bIns="0" rtlCol="0" anchor="ctr"/>
           <a:lstStyle/>
           <a:p>
-            <a:pPr indent="0" marL="0">
+            <a:pPr marL="0" indent="0">
               <a:buNone/>
             </a:pPr>
             <a:r>
@@ -6048,7 +6066,7 @@
           <a:bodyPr wrap="square" lIns="0" tIns="0" rIns="0" bIns="0" rtlCol="0" anchor="ctr"/>
           <a:lstStyle/>
           <a:p>
-            <a:pPr indent="0" marL="0">
+            <a:pPr marL="0" indent="0">
               <a:buNone/>
             </a:pPr>
             <a:r>
@@ -6090,13 +6108,20 @@
             <a:prstDash val="solid"/>
           </a:ln>
           <a:effectLst>
-            <a:outerShdw sx="100000" sy="100000" kx="0" ky="0" algn="bl" rotWithShape="0" blurRad="101600" dist="38100" dir="8100000">
+            <a:outerShdw blurRad="101600" dist="38100" dir="8100000" algn="bl" rotWithShape="0">
               <a:srgbClr val="000000">
                 <a:alpha val="18000"/>
               </a:srgbClr>
             </a:outerShdw>
           </a:effectLst>
         </p:spPr>
+        <p:txBody>
+          <a:bodyPr/>
+          <a:lstStyle/>
+          <a:p>
+            <a:endParaRPr lang="en-US"/>
+          </a:p>
+        </p:txBody>
       </p:sp>
       <p:sp>
         <p:nvSpPr>
@@ -6122,6 +6147,13 @@
             <a:prstDash val="solid"/>
           </a:ln>
         </p:spPr>
+        <p:txBody>
+          <a:bodyPr/>
+          <a:lstStyle/>
+          <a:p>
+            <a:endParaRPr lang="en-US"/>
+          </a:p>
+        </p:txBody>
       </p:sp>
       <p:sp>
         <p:nvSpPr>
@@ -6144,7 +6176,7 @@
           <a:bodyPr wrap="square" lIns="0" tIns="0" rIns="0" bIns="0" rtlCol="0" anchor="ctr"/>
           <a:lstStyle/>
           <a:p>
-            <a:pPr algn="ctr" indent="0" marL="0">
+            <a:pPr marL="0" indent="0" algn="ctr">
               <a:buNone/>
             </a:pPr>
             <a:r>
@@ -6183,7 +6215,7 @@
           <a:bodyPr wrap="square" lIns="0" tIns="0" rIns="0" bIns="0" rtlCol="0" anchor="ctr"/>
           <a:lstStyle/>
           <a:p>
-            <a:pPr indent="0" marL="0">
+            <a:pPr marL="0" indent="0">
               <a:buNone/>
             </a:pPr>
             <a:r>
@@ -6222,7 +6254,7 @@
           <a:bodyPr wrap="square" lIns="0" tIns="0" rIns="0" bIns="0" rtlCol="0" anchor="ctr"/>
           <a:lstStyle/>
           <a:p>
-            <a:pPr indent="0" marL="0">
+            <a:pPr marL="0" indent="0">
               <a:buNone/>
             </a:pPr>
             <a:r>
@@ -6264,13 +6296,20 @@
             <a:prstDash val="solid"/>
           </a:ln>
           <a:effectLst>
-            <a:outerShdw sx="100000" sy="100000" kx="0" ky="0" algn="bl" rotWithShape="0" blurRad="101600" dist="38100" dir="8100000">
+            <a:outerShdw blurRad="101600" dist="38100" dir="8100000" algn="bl" rotWithShape="0">
               <a:srgbClr val="000000">
                 <a:alpha val="18000"/>
               </a:srgbClr>
             </a:outerShdw>
           </a:effectLst>
         </p:spPr>
+        <p:txBody>
+          <a:bodyPr/>
+          <a:lstStyle/>
+          <a:p>
+            <a:endParaRPr lang="en-US"/>
+          </a:p>
+        </p:txBody>
       </p:sp>
       <p:sp>
         <p:nvSpPr>
@@ -6296,6 +6335,13 @@
             <a:prstDash val="solid"/>
           </a:ln>
         </p:spPr>
+        <p:txBody>
+          <a:bodyPr/>
+          <a:lstStyle/>
+          <a:p>
+            <a:endParaRPr lang="en-US"/>
+          </a:p>
+        </p:txBody>
       </p:sp>
       <p:sp>
         <p:nvSpPr>
@@ -6318,7 +6364,7 @@
           <a:bodyPr wrap="square" lIns="0" tIns="0" rIns="0" bIns="0" rtlCol="0" anchor="ctr"/>
           <a:lstStyle/>
           <a:p>
-            <a:pPr algn="ctr" indent="0" marL="0">
+            <a:pPr marL="0" indent="0" algn="ctr">
               <a:buNone/>
             </a:pPr>
             <a:r>
@@ -6357,7 +6403,7 @@
           <a:bodyPr wrap="square" lIns="0" tIns="0" rIns="0" bIns="0" rtlCol="0" anchor="ctr"/>
           <a:lstStyle/>
           <a:p>
-            <a:pPr indent="0" marL="0">
+            <a:pPr marL="0" indent="0">
               <a:buNone/>
             </a:pPr>
             <a:r>
@@ -6396,7 +6442,7 @@
           <a:bodyPr wrap="square" lIns="0" tIns="0" rIns="0" bIns="0" rtlCol="0" anchor="ctr"/>
           <a:lstStyle/>
           <a:p>
-            <a:pPr indent="0" marL="0">
+            <a:pPr marL="0" indent="0">
               <a:buNone/>
             </a:pPr>
             <a:r>
@@ -6438,13 +6484,20 @@
             <a:prstDash val="solid"/>
           </a:ln>
           <a:effectLst>
-            <a:outerShdw sx="100000" sy="100000" kx="0" ky="0" algn="bl" rotWithShape="0" blurRad="101600" dist="38100" dir="8100000">
+            <a:outerShdw blurRad="101600" dist="38100" dir="8100000" algn="bl" rotWithShape="0">
               <a:srgbClr val="000000">
                 <a:alpha val="18000"/>
               </a:srgbClr>
             </a:outerShdw>
           </a:effectLst>
         </p:spPr>
+        <p:txBody>
+          <a:bodyPr/>
+          <a:lstStyle/>
+          <a:p>
+            <a:endParaRPr lang="en-US"/>
+          </a:p>
+        </p:txBody>
       </p:sp>
       <p:sp>
         <p:nvSpPr>
@@ -6470,6 +6523,13 @@
             <a:prstDash val="solid"/>
           </a:ln>
         </p:spPr>
+        <p:txBody>
+          <a:bodyPr/>
+          <a:lstStyle/>
+          <a:p>
+            <a:endParaRPr lang="en-US"/>
+          </a:p>
+        </p:txBody>
       </p:sp>
       <p:sp>
         <p:nvSpPr>
@@ -6492,7 +6552,7 @@
           <a:bodyPr wrap="square" lIns="0" tIns="0" rIns="0" bIns="0" rtlCol="0" anchor="ctr"/>
           <a:lstStyle/>
           <a:p>
-            <a:pPr algn="ctr" indent="0" marL="0">
+            <a:pPr marL="0" indent="0" algn="ctr">
               <a:buNone/>
             </a:pPr>
             <a:r>
@@ -6531,7 +6591,7 @@
           <a:bodyPr wrap="square" lIns="0" tIns="0" rIns="0" bIns="0" rtlCol="0" anchor="ctr"/>
           <a:lstStyle/>
           <a:p>
-            <a:pPr indent="0" marL="0">
+            <a:pPr marL="0" indent="0">
               <a:buNone/>
             </a:pPr>
             <a:r>
@@ -6570,7 +6630,7 @@
           <a:bodyPr wrap="square" lIns="0" tIns="0" rIns="0" bIns="0" rtlCol="0" anchor="ctr"/>
           <a:lstStyle/>
           <a:p>
-            <a:pPr indent="0" marL="0">
+            <a:pPr marL="0" indent="0">
               <a:buNone/>
             </a:pPr>
             <a:r>
@@ -6612,13 +6672,20 @@
             <a:prstDash val="solid"/>
           </a:ln>
           <a:effectLst>
-            <a:outerShdw sx="100000" sy="100000" kx="0" ky="0" algn="bl" rotWithShape="0" blurRad="101600" dist="38100" dir="8100000">
+            <a:outerShdw blurRad="101600" dist="38100" dir="8100000" algn="bl" rotWithShape="0">
               <a:srgbClr val="000000">
                 <a:alpha val="18000"/>
               </a:srgbClr>
             </a:outerShdw>
           </a:effectLst>
         </p:spPr>
+        <p:txBody>
+          <a:bodyPr/>
+          <a:lstStyle/>
+          <a:p>
+            <a:endParaRPr lang="en-US"/>
+          </a:p>
+        </p:txBody>
       </p:sp>
       <p:sp>
         <p:nvSpPr>
@@ -6644,6 +6711,13 @@
             <a:prstDash val="solid"/>
           </a:ln>
         </p:spPr>
+        <p:txBody>
+          <a:bodyPr/>
+          <a:lstStyle/>
+          <a:p>
+            <a:endParaRPr lang="en-US"/>
+          </a:p>
+        </p:txBody>
       </p:sp>
       <p:sp>
         <p:nvSpPr>
@@ -6666,7 +6740,7 @@
           <a:bodyPr wrap="square" lIns="0" tIns="0" rIns="0" bIns="0" rtlCol="0" anchor="ctr"/>
           <a:lstStyle/>
           <a:p>
-            <a:pPr algn="ctr" indent="0" marL="0">
+            <a:pPr marL="0" indent="0" algn="ctr">
               <a:buNone/>
             </a:pPr>
             <a:r>
@@ -6705,7 +6779,7 @@
           <a:bodyPr wrap="square" lIns="0" tIns="0" rIns="0" bIns="0" rtlCol="0" anchor="ctr"/>
           <a:lstStyle/>
           <a:p>
-            <a:pPr indent="0" marL="0">
+            <a:pPr marL="0" indent="0">
               <a:buNone/>
             </a:pPr>
             <a:r>
@@ -6744,7 +6818,7 @@
           <a:bodyPr wrap="square" lIns="0" tIns="0" rIns="0" bIns="0" rtlCol="0" anchor="ctr"/>
           <a:lstStyle/>
           <a:p>
-            <a:pPr indent="0" marL="0">
+            <a:pPr marL="0" indent="0">
               <a:buNone/>
             </a:pPr>
             <a:r>
@@ -6778,6 +6852,7 @@
         <a:solidFill>
           <a:srgbClr val="1E3A5F"/>
         </a:solidFill>
+        <a:effectLst/>
       </p:bgPr>
     </p:bg>
     <p:spTree>
@@ -6818,6 +6893,13 @@
             <a:prstDash val="solid"/>
           </a:ln>
         </p:spPr>
+        <p:txBody>
+          <a:bodyPr/>
+          <a:lstStyle/>
+          <a:p>
+            <a:endParaRPr lang="en-US"/>
+          </a:p>
+        </p:txBody>
       </p:sp>
       <p:sp>
         <p:nvSpPr>
@@ -6840,7 +6922,7 @@
           <a:bodyPr wrap="square" rtlCol="0" anchor="ctr"/>
           <a:lstStyle/>
           <a:p>
-            <a:pPr algn="l" indent="0" marL="0">
+            <a:pPr marL="0" indent="0" algn="l">
               <a:buNone/>
             </a:pPr>
             <a:r>
@@ -6879,7 +6961,7 @@
           <a:bodyPr wrap="square" rtlCol="0" anchor="ctr"/>
           <a:lstStyle/>
           <a:p>
-            <a:pPr algn="l" indent="0" marL="0">
+            <a:pPr marL="0" indent="0" algn="l">
               <a:buNone/>
             </a:pPr>
             <a:r>
@@ -6913,6 +6995,7 @@
         <a:solidFill>
           <a:srgbClr val="FFFFFF"/>
         </a:solidFill>
+        <a:effectLst/>
       </p:bgPr>
     </p:bg>
     <p:spTree>
@@ -6953,6 +7036,13 @@
             <a:prstDash val="solid"/>
           </a:ln>
         </p:spPr>
+        <p:txBody>
+          <a:bodyPr/>
+          <a:lstStyle/>
+          <a:p>
+            <a:endParaRPr lang="en-US"/>
+          </a:p>
+        </p:txBody>
       </p:sp>
       <p:sp>
         <p:nvSpPr>
@@ -6978,6 +7068,13 @@
             <a:prstDash val="solid"/>
           </a:ln>
         </p:spPr>
+        <p:txBody>
+          <a:bodyPr/>
+          <a:lstStyle/>
+          <a:p>
+            <a:endParaRPr lang="en-US"/>
+          </a:p>
+        </p:txBody>
       </p:sp>
       <p:sp>
         <p:nvSpPr>
@@ -7000,7 +7097,7 @@
           <a:bodyPr wrap="square" rtlCol="0" anchor="ctr"/>
           <a:lstStyle/>
           <a:p>
-            <a:pPr indent="0" marL="0">
+            <a:pPr marL="0" indent="0">
               <a:buNone/>
             </a:pPr>
             <a:r>
@@ -7039,7 +7136,7 @@
           <a:bodyPr wrap="square" rtlCol="0" anchor="ctr"/>
           <a:lstStyle/>
           <a:p>
-            <a:pPr algn="ctr" indent="0" marL="0">
+            <a:pPr marL="0" indent="0" algn="ctr">
               <a:buNone/>
             </a:pPr>
             <a:r>
@@ -7078,7 +7175,7 @@
           <a:bodyPr wrap="square" lIns="0" tIns="0" rIns="0" bIns="0" rtlCol="0" anchor="ctr"/>
           <a:lstStyle/>
           <a:p>
-            <a:pPr algn="l" indent="0" marL="0">
+            <a:pPr marL="0" indent="0" algn="l">
               <a:buNone/>
             </a:pPr>
             <a:r>
@@ -7120,6 +7217,13 @@
             <a:prstDash val="solid"/>
           </a:ln>
         </p:spPr>
+        <p:txBody>
+          <a:bodyPr/>
+          <a:lstStyle/>
+          <a:p>
+            <a:endParaRPr lang="en-US"/>
+          </a:p>
+        </p:txBody>
       </p:sp>
       <p:sp>
         <p:nvSpPr>
@@ -7145,6 +7249,13 @@
             <a:prstDash val="solid"/>
           </a:ln>
         </p:spPr>
+        <p:txBody>
+          <a:bodyPr/>
+          <a:lstStyle/>
+          <a:p>
+            <a:endParaRPr lang="en-US"/>
+          </a:p>
+        </p:txBody>
       </p:sp>
       <p:sp>
         <p:nvSpPr>
@@ -7167,7 +7278,7 @@
           <a:bodyPr wrap="square" lIns="0" tIns="0" rIns="0" bIns="0" rtlCol="0" anchor="ctr"/>
           <a:lstStyle/>
           <a:p>
-            <a:pPr algn="ctr" indent="0" marL="0">
+            <a:pPr marL="0" indent="0" algn="ctr">
               <a:buNone/>
             </a:pPr>
             <a:r>
@@ -7206,7 +7317,7 @@
           <a:bodyPr wrap="square" lIns="0" tIns="0" rIns="0" bIns="0" rtlCol="0" anchor="ctr"/>
           <a:lstStyle/>
           <a:p>
-            <a:pPr indent="0" marL="0">
+            <a:pPr marL="0" indent="0">
               <a:buNone/>
             </a:pPr>
             <a:r>
@@ -7245,7 +7356,7 @@
           <a:bodyPr wrap="square" lIns="0" tIns="0" rIns="0" bIns="0" rtlCol="0" anchor="ctr"/>
           <a:lstStyle/>
           <a:p>
-            <a:pPr indent="0" marL="0">
+            <a:pPr marL="0" indent="0">
               <a:buNone/>
             </a:pPr>
             <a:r>
@@ -7287,6 +7398,13 @@
             <a:prstDash val="solid"/>
           </a:ln>
         </p:spPr>
+        <p:txBody>
+          <a:bodyPr/>
+          <a:lstStyle/>
+          <a:p>
+            <a:endParaRPr lang="en-US"/>
+          </a:p>
+        </p:txBody>
       </p:sp>
       <p:sp>
         <p:nvSpPr>
@@ -7312,6 +7430,13 @@
             <a:prstDash val="solid"/>
           </a:ln>
         </p:spPr>
+        <p:txBody>
+          <a:bodyPr/>
+          <a:lstStyle/>
+          <a:p>
+            <a:endParaRPr lang="en-US"/>
+          </a:p>
+        </p:txBody>
       </p:sp>
       <p:sp>
         <p:nvSpPr>
@@ -7334,7 +7459,7 @@
           <a:bodyPr wrap="square" lIns="0" tIns="0" rIns="0" bIns="0" rtlCol="0" anchor="ctr"/>
           <a:lstStyle/>
           <a:p>
-            <a:pPr algn="ctr" indent="0" marL="0">
+            <a:pPr marL="0" indent="0" algn="ctr">
               <a:buNone/>
             </a:pPr>
             <a:r>
@@ -7373,7 +7498,7 @@
           <a:bodyPr wrap="square" lIns="0" tIns="0" rIns="0" bIns="0" rtlCol="0" anchor="ctr"/>
           <a:lstStyle/>
           <a:p>
-            <a:pPr indent="0" marL="0">
+            <a:pPr marL="0" indent="0">
               <a:buNone/>
             </a:pPr>
             <a:r>
@@ -7412,7 +7537,7 @@
           <a:bodyPr wrap="square" lIns="0" tIns="0" rIns="0" bIns="0" rtlCol="0" anchor="ctr"/>
           <a:lstStyle/>
           <a:p>
-            <a:pPr indent="0" marL="0">
+            <a:pPr marL="0" indent="0">
               <a:buNone/>
             </a:pPr>
             <a:r>
@@ -7454,6 +7579,13 @@
             <a:prstDash val="solid"/>
           </a:ln>
         </p:spPr>
+        <p:txBody>
+          <a:bodyPr/>
+          <a:lstStyle/>
+          <a:p>
+            <a:endParaRPr lang="en-US"/>
+          </a:p>
+        </p:txBody>
       </p:sp>
       <p:sp>
         <p:nvSpPr>
@@ -7479,6 +7611,13 @@
             <a:prstDash val="solid"/>
           </a:ln>
         </p:spPr>
+        <p:txBody>
+          <a:bodyPr/>
+          <a:lstStyle/>
+          <a:p>
+            <a:endParaRPr lang="en-US"/>
+          </a:p>
+        </p:txBody>
       </p:sp>
       <p:sp>
         <p:nvSpPr>
@@ -7501,7 +7640,7 @@
           <a:bodyPr wrap="square" lIns="0" tIns="0" rIns="0" bIns="0" rtlCol="0" anchor="ctr"/>
           <a:lstStyle/>
           <a:p>
-            <a:pPr algn="ctr" indent="0" marL="0">
+            <a:pPr marL="0" indent="0" algn="ctr">
               <a:buNone/>
             </a:pPr>
             <a:r>
@@ -7540,7 +7679,7 @@
           <a:bodyPr wrap="square" lIns="0" tIns="0" rIns="0" bIns="0" rtlCol="0" anchor="ctr"/>
           <a:lstStyle/>
           <a:p>
-            <a:pPr indent="0" marL="0">
+            <a:pPr marL="0" indent="0">
               <a:buNone/>
             </a:pPr>
             <a:r>
@@ -7579,7 +7718,7 @@
           <a:bodyPr wrap="square" lIns="0" tIns="0" rIns="0" bIns="0" rtlCol="0" anchor="ctr"/>
           <a:lstStyle/>
           <a:p>
-            <a:pPr indent="0" marL="0">
+            <a:pPr marL="0" indent="0">
               <a:buNone/>
             </a:pPr>
             <a:r>
@@ -7621,6 +7760,13 @@
             <a:prstDash val="solid"/>
           </a:ln>
         </p:spPr>
+        <p:txBody>
+          <a:bodyPr/>
+          <a:lstStyle/>
+          <a:p>
+            <a:endParaRPr lang="en-US"/>
+          </a:p>
+        </p:txBody>
       </p:sp>
       <p:sp>
         <p:nvSpPr>
@@ -7646,6 +7792,13 @@
             <a:prstDash val="solid"/>
           </a:ln>
         </p:spPr>
+        <p:txBody>
+          <a:bodyPr/>
+          <a:lstStyle/>
+          <a:p>
+            <a:endParaRPr lang="en-US"/>
+          </a:p>
+        </p:txBody>
       </p:sp>
       <p:sp>
         <p:nvSpPr>
@@ -7668,7 +7821,7 @@
           <a:bodyPr wrap="square" lIns="0" tIns="0" rIns="0" bIns="0" rtlCol="0" anchor="ctr"/>
           <a:lstStyle/>
           <a:p>
-            <a:pPr algn="ctr" indent="0" marL="0">
+            <a:pPr marL="0" indent="0" algn="ctr">
               <a:buNone/>
             </a:pPr>
             <a:r>
@@ -7707,7 +7860,7 @@
           <a:bodyPr wrap="square" lIns="0" tIns="0" rIns="0" bIns="0" rtlCol="0" anchor="ctr"/>
           <a:lstStyle/>
           <a:p>
-            <a:pPr indent="0" marL="0">
+            <a:pPr marL="0" indent="0">
               <a:buNone/>
             </a:pPr>
             <a:r>
@@ -7746,7 +7899,7 @@
           <a:bodyPr wrap="square" lIns="0" tIns="0" rIns="0" bIns="0" rtlCol="0" anchor="ctr"/>
           <a:lstStyle/>
           <a:p>
-            <a:pPr indent="0" marL="0">
+            <a:pPr marL="0" indent="0">
               <a:buNone/>
             </a:pPr>
             <a:r>
@@ -7788,6 +7941,13 @@
             <a:prstDash val="solid"/>
           </a:ln>
         </p:spPr>
+        <p:txBody>
+          <a:bodyPr/>
+          <a:lstStyle/>
+          <a:p>
+            <a:endParaRPr lang="en-US"/>
+          </a:p>
+        </p:txBody>
       </p:sp>
       <p:sp>
         <p:nvSpPr>
@@ -7813,6 +7973,13 @@
             <a:prstDash val="solid"/>
           </a:ln>
         </p:spPr>
+        <p:txBody>
+          <a:bodyPr/>
+          <a:lstStyle/>
+          <a:p>
+            <a:endParaRPr lang="en-US"/>
+          </a:p>
+        </p:txBody>
       </p:sp>
       <p:sp>
         <p:nvSpPr>
@@ -7835,7 +8002,7 @@
           <a:bodyPr wrap="square" lIns="0" tIns="0" rIns="0" bIns="0" rtlCol="0" anchor="ctr"/>
           <a:lstStyle/>
           <a:p>
-            <a:pPr algn="ctr" indent="0" marL="0">
+            <a:pPr marL="0" indent="0" algn="ctr">
               <a:buNone/>
             </a:pPr>
             <a:r>
@@ -7874,7 +8041,7 @@
           <a:bodyPr wrap="square" lIns="0" tIns="0" rIns="0" bIns="0" rtlCol="0" anchor="ctr"/>
           <a:lstStyle/>
           <a:p>
-            <a:pPr indent="0" marL="0">
+            <a:pPr marL="0" indent="0">
               <a:buNone/>
             </a:pPr>
             <a:r>
@@ -7913,7 +8080,7 @@
           <a:bodyPr wrap="square" lIns="0" tIns="0" rIns="0" bIns="0" rtlCol="0" anchor="ctr"/>
           <a:lstStyle/>
           <a:p>
-            <a:pPr indent="0" marL="0">
+            <a:pPr marL="0" indent="0">
               <a:buNone/>
             </a:pPr>
             <a:r>
@@ -7947,6 +8114,7 @@
         <a:solidFill>
           <a:srgbClr val="FFFFFF"/>
         </a:solidFill>
+        <a:effectLst/>
       </p:bgPr>
     </p:bg>
     <p:spTree>
@@ -7987,6 +8155,13 @@
             <a:prstDash val="solid"/>
           </a:ln>
         </p:spPr>
+        <p:txBody>
+          <a:bodyPr/>
+          <a:lstStyle/>
+          <a:p>
+            <a:endParaRPr lang="en-US"/>
+          </a:p>
+        </p:txBody>
       </p:sp>
       <p:sp>
         <p:nvSpPr>
@@ -8012,6 +8187,13 @@
             <a:prstDash val="solid"/>
           </a:ln>
         </p:spPr>
+        <p:txBody>
+          <a:bodyPr/>
+          <a:lstStyle/>
+          <a:p>
+            <a:endParaRPr lang="en-US"/>
+          </a:p>
+        </p:txBody>
       </p:sp>
       <p:sp>
         <p:nvSpPr>
@@ -8034,7 +8216,7 @@
           <a:bodyPr wrap="square" rtlCol="0" anchor="ctr"/>
           <a:lstStyle/>
           <a:p>
-            <a:pPr indent="0" marL="0">
+            <a:pPr marL="0" indent="0">
               <a:buNone/>
             </a:pPr>
             <a:r>
@@ -8073,7 +8255,7 @@
           <a:bodyPr wrap="square" rtlCol="0" anchor="ctr"/>
           <a:lstStyle/>
           <a:p>
-            <a:pPr algn="ctr" indent="0" marL="0">
+            <a:pPr marL="0" indent="0" algn="ctr">
               <a:buNone/>
             </a:pPr>
             <a:r>
@@ -8112,7 +8294,7 @@
           <a:bodyPr wrap="square" lIns="0" tIns="0" rIns="0" bIns="0" rtlCol="0" anchor="ctr"/>
           <a:lstStyle/>
           <a:p>
-            <a:pPr algn="l" indent="0" marL="0">
+            <a:pPr marL="0" indent="0" algn="l">
               <a:buNone/>
             </a:pPr>
             <a:r>
@@ -8130,321 +8312,36 @@
           </a:p>
         </p:txBody>
       </p:sp>
-      <p:sp>
-        <p:nvSpPr>
-          <p:cNvPr id="7" name="Shape 5"/>
-          <p:cNvSpPr/>
-          <p:nvPr/>
-        </p:nvSpPr>
-        <p:spPr>
-          <a:xfrm>
-            <a:off x="274320" y="914400"/>
-            <a:ext cx="8595360" cy="3703320"/>
-          </a:xfrm>
-          <a:prstGeom prst="rect">
-            <a:avLst/>
-          </a:prstGeom>
-          <a:solidFill>
-            <a:srgbClr val="1E1E2E"/>
-          </a:solidFill>
-          <a:ln w="12700">
-            <a:solidFill>
-              <a:srgbClr val="333355"/>
-            </a:solidFill>
-            <a:prstDash val="solid"/>
-          </a:ln>
-          <a:effectLst>
-            <a:outerShdw sx="100000" sy="100000" kx="0" ky="0" algn="bl" rotWithShape="0" blurRad="101600" dist="38100" dir="8100000">
-              <a:srgbClr val="000000">
-                <a:alpha val="18000"/>
-              </a:srgbClr>
-            </a:outerShdw>
-          </a:effectLst>
-        </p:spPr>
-      </p:sp>
-      <p:sp>
-        <p:nvSpPr>
-          <p:cNvPr id="8" name="Text 6"/>
-          <p:cNvSpPr/>
-          <p:nvPr/>
-        </p:nvSpPr>
-        <p:spPr>
-          <a:xfrm>
-            <a:off x="411480" y="1005840"/>
-            <a:ext cx="8321040" cy="3520440"/>
-          </a:xfrm>
-          <a:prstGeom prst="rect">
-            <a:avLst/>
-          </a:prstGeom>
-          <a:noFill/>
-          <a:ln/>
-        </p:spPr>
-        <p:txBody>
-          <a:bodyPr wrap="square" rtlCol="0" anchor="t"/>
-          <a:lstStyle/>
-          <a:p>
-            <a:pPr indent="0" marL="0">
-              <a:buNone/>
-            </a:pPr>
-            <a:r>
-              <a:rPr lang="en-US" sz="950" b="1" dirty="0">
-                <a:solidFill>
-                  <a:srgbClr val="FFFFFF"/>
-                </a:solidFill>
-                <a:latin typeface="Consolas" pitchFamily="34" charset="0"/>
-                <a:ea typeface="Consolas" pitchFamily="34" charset="-122"/>
-                <a:cs typeface="Consolas" pitchFamily="34" charset="-120"/>
-              </a:rPr>
-              <a:t>SDA-Pro -- Security Incident Response &amp; Threat Mitigation Platform</a:t>
-            </a:r>
-            <a:endParaRPr lang="en-US" sz="950" dirty="0"/>
-          </a:p>
-          <a:p>
-            <a:pPr indent="0" marL="0">
-              <a:buNone/>
-            </a:pPr>
-            <a:r>
-              <a:rPr lang="en-US" sz="950" b="1" dirty="0">
-                <a:solidFill>
-                  <a:srgbClr val="FFFFFF"/>
-                </a:solidFill>
-                <a:latin typeface="Consolas" pitchFamily="34" charset="0"/>
-                <a:ea typeface="Consolas" pitchFamily="34" charset="-122"/>
-                <a:cs typeface="Consolas" pitchFamily="34" charset="-120"/>
-              </a:rPr>
-              <a:t>Team: Hassan Zahid (54481) | Malik Hamza Shahid (54523)</a:t>
-            </a:r>
-            <a:endParaRPr lang="en-US" sz="950" dirty="0"/>
-          </a:p>
-          <a:p>
-            <a:pPr indent="0" marL="0">
-              <a:buNone/>
-            </a:pPr>
-            <a:endParaRPr lang="en-US" sz="950" dirty="0"/>
-          </a:p>
-          <a:p>
-            <a:pPr indent="0" marL="0">
-              <a:buNone/>
-            </a:pPr>
-            <a:r>
-              <a:rPr lang="en-US" sz="950" dirty="0">
-                <a:solidFill>
-                  <a:srgbClr val="AABBCC"/>
-                </a:solidFill>
-                <a:latin typeface="Consolas" pitchFamily="34" charset="0"/>
-                <a:ea typeface="Consolas" pitchFamily="34" charset="-122"/>
-                <a:cs typeface="Consolas" pitchFamily="34" charset="-120"/>
-              </a:rPr>
-              <a:t>[Adapter] Pulling SIEM alert from SDA-Pro Splunk mock connector...</a:t>
-            </a:r>
-            <a:endParaRPr lang="en-US" sz="950" dirty="0"/>
-          </a:p>
-          <a:p>
-            <a:pPr indent="0" marL="0">
-              <a:buNone/>
-            </a:pPr>
-            <a:r>
-              <a:rPr lang="en-US" sz="950" dirty="0">
-                <a:solidFill>
-                  <a:srgbClr val="AABBCC"/>
-                </a:solidFill>
-                <a:latin typeface="Consolas" pitchFamily="34" charset="0"/>
-                <a:ea typeface="Consolas" pitchFamily="34" charset="-122"/>
-                <a:cs typeface="Consolas" pitchFamily="34" charset="-120"/>
-              </a:rPr>
-              <a:t>[Factory Method] SIEM normalizer mapped raw login data to CanonicalAlert.</a:t>
-            </a:r>
-            <a:endParaRPr lang="en-US" sz="950" dirty="0"/>
-          </a:p>
-          <a:p>
-            <a:pPr indent="0" marL="0">
-              <a:buNone/>
-            </a:pPr>
-            <a:r>
-              <a:rPr lang="en-US" sz="950" dirty="0">
-                <a:solidFill>
-                  <a:srgbClr val="AABBCC"/>
-                </a:solidFill>
-                <a:latin typeface="Consolas" pitchFamily="34" charset="0"/>
-                <a:ea typeface="Consolas" pitchFamily="34" charset="-122"/>
-                <a:cs typeface="Consolas" pitchFamily="34" charset="-120"/>
-              </a:rPr>
-              <a:t>[AbstractFactory] PremiumEnrichmentFactory: creating ThreatIntelHandler with VirusTotal</a:t>
-            </a:r>
-            <a:endParaRPr lang="en-US" sz="950" dirty="0"/>
-          </a:p>
-          <a:p>
-            <a:pPr indent="0" marL="0">
-              <a:buNone/>
-            </a:pPr>
-            <a:r>
-              <a:rPr lang="en-US" sz="950" dirty="0">
-                <a:solidFill>
-                  <a:srgbClr val="AABBCC"/>
-                </a:solidFill>
-                <a:latin typeface="Consolas" pitchFamily="34" charset="0"/>
-                <a:ea typeface="Consolas" pitchFamily="34" charset="-122"/>
-                <a:cs typeface="Consolas" pitchFamily="34" charset="-120"/>
-              </a:rPr>
-              <a:t>[Proxy] Cache miss. Querying external reputation adapter...</a:t>
-            </a:r>
-            <a:endParaRPr lang="en-US" sz="950" dirty="0"/>
-          </a:p>
-          <a:p>
-            <a:pPr indent="0" marL="0">
-              <a:buNone/>
-            </a:pPr>
-            <a:r>
-              <a:rPr lang="en-US" sz="950" dirty="0">
-                <a:solidFill>
-                  <a:srgbClr val="AABBCC"/>
-                </a:solidFill>
-                <a:latin typeface="Consolas" pitchFamily="34" charset="0"/>
-                <a:ea typeface="Consolas" pitchFamily="34" charset="-122"/>
-                <a:cs typeface="Consolas" pitchFamily="34" charset="-120"/>
-              </a:rPr>
-              <a:t>[Adapter] VirusTotalAdapter reputation lookup for: 203.0.113.45</a:t>
-            </a:r>
-            <a:endParaRPr lang="en-US" sz="950" dirty="0"/>
-          </a:p>
-          <a:p>
-            <a:pPr indent="0" marL="0">
-              <a:buNone/>
-            </a:pPr>
-            <a:r>
-              <a:rPr lang="en-US" sz="950" dirty="0">
-                <a:solidFill>
-                  <a:srgbClr val="AABBCC"/>
-                </a:solidFill>
-                <a:latin typeface="Consolas" pitchFamily="34" charset="0"/>
-                <a:ea typeface="Consolas" pitchFamily="34" charset="-122"/>
-                <a:cs typeface="Consolas" pitchFamily="34" charset="-120"/>
-              </a:rPr>
-              <a:t>[Chain] ThreatIntelHandler: ReputationResult{203.0.113.45, score=92, verdict='MALICIOUS'}</a:t>
-            </a:r>
-            <a:endParaRPr lang="en-US" sz="950" dirty="0"/>
-          </a:p>
-          <a:p>
-            <a:pPr indent="0" marL="0">
-              <a:buNone/>
-            </a:pPr>
-            <a:r>
-              <a:rPr lang="en-US" sz="950" dirty="0">
-                <a:solidFill>
-                  <a:srgbClr val="00FF88"/>
-                </a:solidFill>
-                <a:latin typeface="Consolas" pitchFamily="34" charset="0"/>
-                <a:ea typeface="Consolas" pitchFamily="34" charset="-122"/>
-                <a:cs typeface="Consolas" pitchFamily="34" charset="-120"/>
-              </a:rPr>
-              <a:t>[State] NewState -&gt; UnderTriageState -&gt; ContainmentState</a:t>
-            </a:r>
-            <a:endParaRPr lang="en-US" sz="950" dirty="0"/>
-          </a:p>
-          <a:p>
-            <a:pPr indent="0" marL="0">
-              <a:buNone/>
-            </a:pPr>
-            <a:r>
-              <a:rPr lang="en-US" sz="950" dirty="0">
-                <a:solidFill>
-                  <a:srgbClr val="FFD700"/>
-                </a:solidFill>
-                <a:latin typeface="Consolas" pitchFamily="34" charset="0"/>
-                <a:ea typeface="Consolas" pitchFamily="34" charset="-122"/>
-                <a:cs typeface="Consolas" pitchFamily="34" charset="-120"/>
-              </a:rPr>
-              <a:t>[Facade] Coordinating SDA-Pro response workflow for INC-001</a:t>
-            </a:r>
-            <a:endParaRPr lang="en-US" sz="950" dirty="0"/>
-          </a:p>
-          <a:p>
-            <a:pPr indent="0" marL="0">
-              <a:buNone/>
-            </a:pPr>
-            <a:r>
-              <a:rPr lang="en-US" sz="950" dirty="0">
-                <a:solidFill>
-                  <a:srgbClr val="FFD700"/>
-                </a:solidFill>
-                <a:latin typeface="Consolas" pitchFamily="34" charset="0"/>
-                <a:ea typeface="Consolas" pitchFamily="34" charset="-122"/>
-                <a:cs typeface="Consolas" pitchFamily="34" charset="-120"/>
-              </a:rPr>
-              <a:t>[Strategy] Aggressive Containment selected for CRITICAL incident.</a:t>
-            </a:r>
-            <a:endParaRPr lang="en-US" sz="950" dirty="0"/>
-          </a:p>
-          <a:p>
-            <a:pPr indent="0" marL="0">
-              <a:buNone/>
-            </a:pPr>
-            <a:r>
-              <a:rPr lang="en-US" sz="950" dirty="0">
-                <a:solidFill>
-                  <a:srgbClr val="AABBCC"/>
-                </a:solidFill>
-                <a:latin typeface="Consolas" pitchFamily="34" charset="0"/>
-                <a:ea typeface="Consolas" pitchFamily="34" charset="-122"/>
-                <a:cs typeface="Consolas" pitchFamily="34" charset="-120"/>
-              </a:rPr>
-              <a:t>[Decorator] AuditLogDecorator + ApprovalGateDecorator + MetricsDecorator chained</a:t>
-            </a:r>
-            <a:endParaRPr lang="en-US" sz="950" dirty="0"/>
-          </a:p>
-          <a:p>
-            <a:pPr indent="0" marL="0">
-              <a:buNone/>
-            </a:pPr>
-            <a:r>
-              <a:rPr lang="en-US" sz="950" dirty="0">
-                <a:solidFill>
-                  <a:srgbClr val="AABBCC"/>
-                </a:solidFill>
-                <a:latin typeface="Consolas" pitchFamily="34" charset="0"/>
-                <a:ea typeface="Consolas" pitchFamily="34" charset="-122"/>
-                <a:cs typeface="Consolas" pitchFamily="34" charset="-120"/>
-              </a:rPr>
-              <a:t>[Action] Blocking malicious IP: 203.0.113.45  |  Quarantine + Isolate executed</a:t>
-            </a:r>
-            <a:endParaRPr lang="en-US" sz="950" dirty="0"/>
-          </a:p>
-          <a:p>
-            <a:pPr indent="0" marL="0">
-              <a:buNone/>
-            </a:pPr>
-            <a:r>
-              <a:rPr lang="en-US" sz="950" dirty="0">
-                <a:solidFill>
-                  <a:srgbClr val="00A8E8"/>
-                </a:solidFill>
-                <a:latin typeface="Consolas" pitchFamily="34" charset="0"/>
-                <a:ea typeface="Consolas" pitchFamily="34" charset="-122"/>
-                <a:cs typeface="Consolas" pitchFamily="34" charset="-120"/>
-              </a:rPr>
-              <a:t>[Observer] Dashboard, Audit, Notification, Metrics all notified</a:t>
-            </a:r>
-            <a:endParaRPr lang="en-US" sz="950" dirty="0"/>
-          </a:p>
-          <a:p>
-            <a:pPr indent="0" marL="0">
-              <a:buNone/>
-            </a:pPr>
-            <a:r>
-              <a:rPr lang="en-US" sz="950" dirty="0">
-                <a:solidFill>
-                  <a:srgbClr val="00FF88"/>
-                </a:solidFill>
-                <a:latin typeface="Consolas" pitchFamily="34" charset="0"/>
-                <a:ea typeface="Consolas" pitchFamily="34" charset="-122"/>
-                <a:cs typeface="Consolas" pitchFamily="34" charset="-120"/>
-              </a:rPr>
-              <a:t>[State] ContainmentState -&gt; Eradication -&gt; Recovery -&gt; Closed</a:t>
-            </a:r>
-            <a:endParaRPr lang="en-US" sz="950" dirty="0"/>
-          </a:p>
-        </p:txBody>
-      </p:sp>
+      <p:pic>
+        <p:nvPicPr>
+          <p:cNvPr id="9" name="Picture 8">
+            <a:extLst>
+              <a:ext uri="{FF2B5EF4-FFF2-40B4-BE49-F238E27FC236}">
+                <a16:creationId xmlns:a16="http://schemas.microsoft.com/office/drawing/2014/main" id="{1D554D27-208B-AC3D-FAA1-0A27EABE0D4D}"/>
+              </a:ext>
+            </a:extLst>
+          </p:cNvPr>
+          <p:cNvPicPr>
+            <a:picLocks noChangeAspect="1"/>
+          </p:cNvPicPr>
+          <p:nvPr/>
+        </p:nvPicPr>
+        <p:blipFill>
+          <a:blip r:embed="rId3"/>
+          <a:stretch>
+            <a:fillRect/>
+          </a:stretch>
+        </p:blipFill>
+        <p:spPr>
+          <a:xfrm>
+            <a:off x="1737360" y="891096"/>
+            <a:ext cx="5669280" cy="3767772"/>
+          </a:xfrm>
+          <a:prstGeom prst="rect">
+            <a:avLst/>
+          </a:prstGeom>
+        </p:spPr>
+      </p:pic>
     </p:spTree>
   </p:cSld>
   <p:clrMapOvr>
@@ -8461,6 +8358,7 @@
         <a:solidFill>
           <a:srgbClr val="FFFFFF"/>
         </a:solidFill>
+        <a:effectLst/>
       </p:bgPr>
     </p:bg>
     <p:spTree>
@@ -8501,6 +8399,13 @@
             <a:prstDash val="solid"/>
           </a:ln>
         </p:spPr>
+        <p:txBody>
+          <a:bodyPr/>
+          <a:lstStyle/>
+          <a:p>
+            <a:endParaRPr lang="en-US"/>
+          </a:p>
+        </p:txBody>
       </p:sp>
       <p:sp>
         <p:nvSpPr>
@@ -8526,6 +8431,13 @@
             <a:prstDash val="solid"/>
           </a:ln>
         </p:spPr>
+        <p:txBody>
+          <a:bodyPr/>
+          <a:lstStyle/>
+          <a:p>
+            <a:endParaRPr lang="en-US"/>
+          </a:p>
+        </p:txBody>
       </p:sp>
       <p:sp>
         <p:nvSpPr>
@@ -8548,7 +8460,7 @@
           <a:bodyPr wrap="square" rtlCol="0" anchor="ctr"/>
           <a:lstStyle/>
           <a:p>
-            <a:pPr indent="0" marL="0">
+            <a:pPr marL="0" indent="0">
               <a:buNone/>
             </a:pPr>
             <a:r>
@@ -8587,7 +8499,7 @@
           <a:bodyPr wrap="square" rtlCol="0" anchor="ctr"/>
           <a:lstStyle/>
           <a:p>
-            <a:pPr algn="ctr" indent="0" marL="0">
+            <a:pPr marL="0" indent="0" algn="ctr">
               <a:buNone/>
             </a:pPr>
             <a:r>
@@ -8626,7 +8538,7 @@
           <a:bodyPr wrap="square" lIns="0" tIns="0" rIns="0" bIns="0" rtlCol="0" anchor="ctr"/>
           <a:lstStyle/>
           <a:p>
-            <a:pPr algn="l" indent="0" marL="0">
+            <a:pPr marL="0" indent="0" algn="l">
               <a:buNone/>
             </a:pPr>
             <a:r>
@@ -8668,6 +8580,13 @@
             <a:prstDash val="solid"/>
           </a:ln>
         </p:spPr>
+        <p:txBody>
+          <a:bodyPr/>
+          <a:lstStyle/>
+          <a:p>
+            <a:endParaRPr lang="en-US"/>
+          </a:p>
+        </p:txBody>
       </p:sp>
       <p:sp>
         <p:nvSpPr>
@@ -8693,6 +8612,13 @@
             <a:prstDash val="solid"/>
           </a:ln>
         </p:spPr>
+        <p:txBody>
+          <a:bodyPr/>
+          <a:lstStyle/>
+          <a:p>
+            <a:endParaRPr lang="en-US"/>
+          </a:p>
+        </p:txBody>
       </p:sp>
       <p:sp>
         <p:nvSpPr>
@@ -8715,7 +8641,7 @@
           <a:bodyPr wrap="square" lIns="0" tIns="0" rIns="0" bIns="0" rtlCol="0" anchor="ctr"/>
           <a:lstStyle/>
           <a:p>
-            <a:pPr algn="ctr" indent="0" marL="0">
+            <a:pPr marL="0" indent="0" algn="ctr">
               <a:buNone/>
             </a:pPr>
             <a:r>
@@ -8754,7 +8680,7 @@
           <a:bodyPr wrap="square" lIns="0" tIns="0" rIns="0" bIns="0" rtlCol="0" anchor="ctr"/>
           <a:lstStyle/>
           <a:p>
-            <a:pPr indent="0" marL="0">
+            <a:pPr marL="0" indent="0">
               <a:buNone/>
             </a:pPr>
             <a:r>
@@ -8793,7 +8719,7 @@
           <a:bodyPr wrap="square" lIns="0" tIns="0" rIns="0" bIns="0" rtlCol="0" anchor="ctr"/>
           <a:lstStyle/>
           <a:p>
-            <a:pPr indent="0" marL="0">
+            <a:pPr marL="0" indent="0">
               <a:buNone/>
             </a:pPr>
             <a:r>
@@ -8835,6 +8761,13 @@
             <a:prstDash val="solid"/>
           </a:ln>
         </p:spPr>
+        <p:txBody>
+          <a:bodyPr/>
+          <a:lstStyle/>
+          <a:p>
+            <a:endParaRPr lang="en-US"/>
+          </a:p>
+        </p:txBody>
       </p:sp>
       <p:sp>
         <p:nvSpPr>
@@ -8860,6 +8793,13 @@
             <a:prstDash val="solid"/>
           </a:ln>
         </p:spPr>
+        <p:txBody>
+          <a:bodyPr/>
+          <a:lstStyle/>
+          <a:p>
+            <a:endParaRPr lang="en-US"/>
+          </a:p>
+        </p:txBody>
       </p:sp>
       <p:sp>
         <p:nvSpPr>
@@ -8882,7 +8822,7 @@
           <a:bodyPr wrap="square" lIns="0" tIns="0" rIns="0" bIns="0" rtlCol="0" anchor="ctr"/>
           <a:lstStyle/>
           <a:p>
-            <a:pPr algn="ctr" indent="0" marL="0">
+            <a:pPr marL="0" indent="0" algn="ctr">
               <a:buNone/>
             </a:pPr>
             <a:r>
@@ -8921,7 +8861,7 @@
           <a:bodyPr wrap="square" lIns="0" tIns="0" rIns="0" bIns="0" rtlCol="0" anchor="ctr"/>
           <a:lstStyle/>
           <a:p>
-            <a:pPr indent="0" marL="0">
+            <a:pPr marL="0" indent="0">
               <a:buNone/>
             </a:pPr>
             <a:r>
@@ -8960,7 +8900,7 @@
           <a:bodyPr wrap="square" lIns="0" tIns="0" rIns="0" bIns="0" rtlCol="0" anchor="ctr"/>
           <a:lstStyle/>
           <a:p>
-            <a:pPr indent="0" marL="0">
+            <a:pPr marL="0" indent="0">
               <a:buNone/>
             </a:pPr>
             <a:r>
@@ -9002,6 +8942,13 @@
             <a:prstDash val="solid"/>
           </a:ln>
         </p:spPr>
+        <p:txBody>
+          <a:bodyPr/>
+          <a:lstStyle/>
+          <a:p>
+            <a:endParaRPr lang="en-US"/>
+          </a:p>
+        </p:txBody>
       </p:sp>
       <p:sp>
         <p:nvSpPr>
@@ -9027,6 +8974,13 @@
             <a:prstDash val="solid"/>
           </a:ln>
         </p:spPr>
+        <p:txBody>
+          <a:bodyPr/>
+          <a:lstStyle/>
+          <a:p>
+            <a:endParaRPr lang="en-US"/>
+          </a:p>
+        </p:txBody>
       </p:sp>
       <p:sp>
         <p:nvSpPr>
@@ -9049,7 +9003,7 @@
           <a:bodyPr wrap="square" lIns="0" tIns="0" rIns="0" bIns="0" rtlCol="0" anchor="ctr"/>
           <a:lstStyle/>
           <a:p>
-            <a:pPr algn="ctr" indent="0" marL="0">
+            <a:pPr marL="0" indent="0" algn="ctr">
               <a:buNone/>
             </a:pPr>
             <a:r>
@@ -9088,7 +9042,7 @@
           <a:bodyPr wrap="square" lIns="0" tIns="0" rIns="0" bIns="0" rtlCol="0" anchor="ctr"/>
           <a:lstStyle/>
           <a:p>
-            <a:pPr indent="0" marL="0">
+            <a:pPr marL="0" indent="0">
               <a:buNone/>
             </a:pPr>
             <a:r>
@@ -9127,7 +9081,7 @@
           <a:bodyPr wrap="square" lIns="0" tIns="0" rIns="0" bIns="0" rtlCol="0" anchor="ctr"/>
           <a:lstStyle/>
           <a:p>
-            <a:pPr indent="0" marL="0">
+            <a:pPr marL="0" indent="0">
               <a:buNone/>
             </a:pPr>
             <a:r>
@@ -9169,6 +9123,13 @@
             <a:prstDash val="solid"/>
           </a:ln>
         </p:spPr>
+        <p:txBody>
+          <a:bodyPr/>
+          <a:lstStyle/>
+          <a:p>
+            <a:endParaRPr lang="en-US"/>
+          </a:p>
+        </p:txBody>
       </p:sp>
       <p:sp>
         <p:nvSpPr>
@@ -9194,6 +9155,13 @@
             <a:prstDash val="solid"/>
           </a:ln>
         </p:spPr>
+        <p:txBody>
+          <a:bodyPr/>
+          <a:lstStyle/>
+          <a:p>
+            <a:endParaRPr lang="en-US"/>
+          </a:p>
+        </p:txBody>
       </p:sp>
       <p:sp>
         <p:nvSpPr>
@@ -9216,7 +9184,7 @@
           <a:bodyPr wrap="square" lIns="0" tIns="0" rIns="0" bIns="0" rtlCol="0" anchor="ctr"/>
           <a:lstStyle/>
           <a:p>
-            <a:pPr algn="ctr" indent="0" marL="0">
+            <a:pPr marL="0" indent="0" algn="ctr">
               <a:buNone/>
             </a:pPr>
             <a:r>
@@ -9255,7 +9223,7 @@
           <a:bodyPr wrap="square" lIns="0" tIns="0" rIns="0" bIns="0" rtlCol="0" anchor="ctr"/>
           <a:lstStyle/>
           <a:p>
-            <a:pPr indent="0" marL="0">
+            <a:pPr marL="0" indent="0">
               <a:buNone/>
             </a:pPr>
             <a:r>
@@ -9294,7 +9262,7 @@
           <a:bodyPr wrap="square" lIns="0" tIns="0" rIns="0" bIns="0" rtlCol="0" anchor="ctr"/>
           <a:lstStyle/>
           <a:p>
-            <a:pPr indent="0" marL="0">
+            <a:pPr marL="0" indent="0">
               <a:buNone/>
             </a:pPr>
             <a:r>
@@ -9336,6 +9304,13 @@
             <a:prstDash val="solid"/>
           </a:ln>
         </p:spPr>
+        <p:txBody>
+          <a:bodyPr/>
+          <a:lstStyle/>
+          <a:p>
+            <a:endParaRPr lang="en-US"/>
+          </a:p>
+        </p:txBody>
       </p:sp>
       <p:sp>
         <p:nvSpPr>
@@ -9361,6 +9336,13 @@
             <a:prstDash val="solid"/>
           </a:ln>
         </p:spPr>
+        <p:txBody>
+          <a:bodyPr/>
+          <a:lstStyle/>
+          <a:p>
+            <a:endParaRPr lang="en-US"/>
+          </a:p>
+        </p:txBody>
       </p:sp>
       <p:sp>
         <p:nvSpPr>
@@ -9383,7 +9365,7 @@
           <a:bodyPr wrap="square" lIns="0" tIns="0" rIns="0" bIns="0" rtlCol="0" anchor="ctr"/>
           <a:lstStyle/>
           <a:p>
-            <a:pPr algn="ctr" indent="0" marL="0">
+            <a:pPr marL="0" indent="0" algn="ctr">
               <a:buNone/>
             </a:pPr>
             <a:r>
@@ -9422,7 +9404,7 @@
           <a:bodyPr wrap="square" lIns="0" tIns="0" rIns="0" bIns="0" rtlCol="0" anchor="ctr"/>
           <a:lstStyle/>
           <a:p>
-            <a:pPr indent="0" marL="0">
+            <a:pPr marL="0" indent="0">
               <a:buNone/>
             </a:pPr>
             <a:r>
@@ -9461,7 +9443,7 @@
           <a:bodyPr wrap="square" lIns="0" tIns="0" rIns="0" bIns="0" rtlCol="0" anchor="ctr"/>
           <a:lstStyle/>
           <a:p>
-            <a:pPr indent="0" marL="0">
+            <a:pPr marL="0" indent="0">
               <a:buNone/>
             </a:pPr>
             <a:r>
@@ -9503,6 +9485,13 @@
             <a:prstDash val="solid"/>
           </a:ln>
         </p:spPr>
+        <p:txBody>
+          <a:bodyPr/>
+          <a:lstStyle/>
+          <a:p>
+            <a:endParaRPr lang="en-US"/>
+          </a:p>
+        </p:txBody>
       </p:sp>
       <p:sp>
         <p:nvSpPr>
@@ -9528,6 +9517,13 @@
             <a:prstDash val="solid"/>
           </a:ln>
         </p:spPr>
+        <p:txBody>
+          <a:bodyPr/>
+          <a:lstStyle/>
+          <a:p>
+            <a:endParaRPr lang="en-US"/>
+          </a:p>
+        </p:txBody>
       </p:sp>
       <p:sp>
         <p:nvSpPr>
@@ -9550,7 +9546,7 @@
           <a:bodyPr wrap="square" lIns="0" tIns="0" rIns="0" bIns="0" rtlCol="0" anchor="ctr"/>
           <a:lstStyle/>
           <a:p>
-            <a:pPr algn="ctr" indent="0" marL="0">
+            <a:pPr marL="0" indent="0" algn="ctr">
               <a:buNone/>
             </a:pPr>
             <a:r>
@@ -9589,7 +9585,7 @@
           <a:bodyPr wrap="square" lIns="0" tIns="0" rIns="0" bIns="0" rtlCol="0" anchor="ctr"/>
           <a:lstStyle/>
           <a:p>
-            <a:pPr indent="0" marL="0">
+            <a:pPr marL="0" indent="0">
               <a:buNone/>
             </a:pPr>
             <a:r>
@@ -9628,7 +9624,7 @@
           <a:bodyPr wrap="square" lIns="0" tIns="0" rIns="0" bIns="0" rtlCol="0" anchor="ctr"/>
           <a:lstStyle/>
           <a:p>
-            <a:pPr indent="0" marL="0">
+            <a:pPr marL="0" indent="0">
               <a:buNone/>
             </a:pPr>
             <a:r>
@@ -9670,6 +9666,13 @@
             <a:prstDash val="solid"/>
           </a:ln>
         </p:spPr>
+        <p:txBody>
+          <a:bodyPr/>
+          <a:lstStyle/>
+          <a:p>
+            <a:endParaRPr lang="en-US"/>
+          </a:p>
+        </p:txBody>
       </p:sp>
       <p:sp>
         <p:nvSpPr>
@@ -9695,6 +9698,13 @@
             <a:prstDash val="solid"/>
           </a:ln>
         </p:spPr>
+        <p:txBody>
+          <a:bodyPr/>
+          <a:lstStyle/>
+          <a:p>
+            <a:endParaRPr lang="en-US"/>
+          </a:p>
+        </p:txBody>
       </p:sp>
       <p:sp>
         <p:nvSpPr>
@@ -9717,7 +9727,7 @@
           <a:bodyPr wrap="square" lIns="0" tIns="0" rIns="0" bIns="0" rtlCol="0" anchor="ctr"/>
           <a:lstStyle/>
           <a:p>
-            <a:pPr algn="ctr" indent="0" marL="0">
+            <a:pPr marL="0" indent="0" algn="ctr">
               <a:buNone/>
             </a:pPr>
             <a:r>
@@ -9756,7 +9766,7 @@
           <a:bodyPr wrap="square" lIns="0" tIns="0" rIns="0" bIns="0" rtlCol="0" anchor="ctr"/>
           <a:lstStyle/>
           <a:p>
-            <a:pPr indent="0" marL="0">
+            <a:pPr marL="0" indent="0">
               <a:buNone/>
             </a:pPr>
             <a:r>
@@ -9795,7 +9805,7 @@
           <a:bodyPr wrap="square" lIns="0" tIns="0" rIns="0" bIns="0" rtlCol="0" anchor="ctr"/>
           <a:lstStyle/>
           <a:p>
-            <a:pPr indent="0" marL="0">
+            <a:pPr marL="0" indent="0">
               <a:buNone/>
             </a:pPr>
             <a:r>
@@ -9837,6 +9847,13 @@
             <a:prstDash val="solid"/>
           </a:ln>
         </p:spPr>
+        <p:txBody>
+          <a:bodyPr/>
+          <a:lstStyle/>
+          <a:p>
+            <a:endParaRPr lang="en-US"/>
+          </a:p>
+        </p:txBody>
       </p:sp>
       <p:sp>
         <p:nvSpPr>
@@ -9862,6 +9879,13 @@
             <a:prstDash val="solid"/>
           </a:ln>
         </p:spPr>
+        <p:txBody>
+          <a:bodyPr/>
+          <a:lstStyle/>
+          <a:p>
+            <a:endParaRPr lang="en-US"/>
+          </a:p>
+        </p:txBody>
       </p:sp>
       <p:sp>
         <p:nvSpPr>
@@ -9884,7 +9908,7 @@
           <a:bodyPr wrap="square" lIns="0" tIns="0" rIns="0" bIns="0" rtlCol="0" anchor="ctr"/>
           <a:lstStyle/>
           <a:p>
-            <a:pPr algn="ctr" indent="0" marL="0">
+            <a:pPr marL="0" indent="0" algn="ctr">
               <a:buNone/>
             </a:pPr>
             <a:r>
@@ -9923,7 +9947,7 @@
           <a:bodyPr wrap="square" lIns="0" tIns="0" rIns="0" bIns="0" rtlCol="0" anchor="ctr"/>
           <a:lstStyle/>
           <a:p>
-            <a:pPr indent="0" marL="0">
+            <a:pPr marL="0" indent="0">
               <a:buNone/>
             </a:pPr>
             <a:r>
@@ -9962,7 +9986,7 @@
           <a:bodyPr wrap="square" lIns="0" tIns="0" rIns="0" bIns="0" rtlCol="0" anchor="ctr"/>
           <a:lstStyle/>
           <a:p>
-            <a:pPr indent="0" marL="0">
+            <a:pPr marL="0" indent="0">
               <a:buNone/>
             </a:pPr>
             <a:r>
@@ -9996,6 +10020,7 @@
         <a:solidFill>
           <a:srgbClr val="1E3A5F"/>
         </a:solidFill>
+        <a:effectLst/>
       </p:bgPr>
     </p:bg>
     <p:spTree>
@@ -10036,6 +10061,13 @@
             <a:prstDash val="solid"/>
           </a:ln>
         </p:spPr>
+        <p:txBody>
+          <a:bodyPr/>
+          <a:lstStyle/>
+          <a:p>
+            <a:endParaRPr lang="en-US"/>
+          </a:p>
+        </p:txBody>
       </p:sp>
       <p:sp>
         <p:nvSpPr>
@@ -10061,6 +10093,13 @@
             <a:prstDash val="solid"/>
           </a:ln>
         </p:spPr>
+        <p:txBody>
+          <a:bodyPr/>
+          <a:lstStyle/>
+          <a:p>
+            <a:endParaRPr lang="en-US"/>
+          </a:p>
+        </p:txBody>
       </p:sp>
       <p:sp>
         <p:nvSpPr>
@@ -10083,7 +10122,7 @@
           <a:bodyPr wrap="square" rtlCol="0" anchor="ctr"/>
           <a:lstStyle/>
           <a:p>
-            <a:pPr algn="l" indent="0" marL="0">
+            <a:pPr marL="0" indent="0" algn="l">
               <a:buNone/>
             </a:pPr>
             <a:r>
@@ -10123,6 +10162,13 @@
             <a:prstDash val="solid"/>
           </a:ln>
         </p:spPr>
+        <p:txBody>
+          <a:bodyPr/>
+          <a:lstStyle/>
+          <a:p>
+            <a:endParaRPr lang="en-US"/>
+          </a:p>
+        </p:txBody>
       </p:sp>
       <p:sp>
         <p:nvSpPr>
@@ -10272,7 +10318,7 @@
           <a:bodyPr wrap="square" rtlCol="0" anchor="ctr"/>
           <a:lstStyle/>
           <a:p>
-            <a:pPr indent="0" marL="0">
+            <a:pPr marL="0" indent="0">
               <a:buNone/>
             </a:pPr>
             <a:r>
@@ -10306,6 +10352,7 @@
         <a:solidFill>
           <a:srgbClr val="FFFFFF"/>
         </a:solidFill>
+        <a:effectLst/>
       </p:bgPr>
     </p:bg>
     <p:spTree>
@@ -10346,6 +10393,13 @@
             <a:prstDash val="solid"/>
           </a:ln>
         </p:spPr>
+        <p:txBody>
+          <a:bodyPr/>
+          <a:lstStyle/>
+          <a:p>
+            <a:endParaRPr lang="en-US"/>
+          </a:p>
+        </p:txBody>
       </p:sp>
       <p:sp>
         <p:nvSpPr>
@@ -10371,6 +10425,13 @@
             <a:prstDash val="solid"/>
           </a:ln>
         </p:spPr>
+        <p:txBody>
+          <a:bodyPr/>
+          <a:lstStyle/>
+          <a:p>
+            <a:endParaRPr lang="en-US"/>
+          </a:p>
+        </p:txBody>
       </p:sp>
       <p:sp>
         <p:nvSpPr>
@@ -10393,7 +10454,7 @@
           <a:bodyPr wrap="square" rtlCol="0" anchor="ctr"/>
           <a:lstStyle/>
           <a:p>
-            <a:pPr indent="0" marL="0">
+            <a:pPr marL="0" indent="0">
               <a:buNone/>
             </a:pPr>
             <a:r>
@@ -10432,7 +10493,7 @@
           <a:bodyPr wrap="square" rtlCol="0" anchor="ctr"/>
           <a:lstStyle/>
           <a:p>
-            <a:pPr algn="ctr" indent="0" marL="0">
+            <a:pPr marL="0" indent="0" algn="ctr">
               <a:buNone/>
             </a:pPr>
             <a:r>
@@ -10471,7 +10532,7 @@
           <a:bodyPr wrap="square" lIns="0" tIns="0" rIns="0" bIns="0" rtlCol="0" anchor="ctr"/>
           <a:lstStyle/>
           <a:p>
-            <a:pPr algn="l" indent="0" marL="0">
+            <a:pPr marL="0" indent="0" algn="l">
               <a:buNone/>
             </a:pPr>
             <a:r>
@@ -10695,6 +10756,7 @@
         <a:solidFill>
           <a:srgbClr val="1E3A5F"/>
         </a:solidFill>
+        <a:effectLst/>
       </p:bgPr>
     </p:bg>
     <p:spTree>
@@ -10735,6 +10797,13 @@
             <a:prstDash val="solid"/>
           </a:ln>
         </p:spPr>
+        <p:txBody>
+          <a:bodyPr/>
+          <a:lstStyle/>
+          <a:p>
+            <a:endParaRPr lang="en-US"/>
+          </a:p>
+        </p:txBody>
       </p:sp>
       <p:sp>
         <p:nvSpPr>
@@ -10757,7 +10826,7 @@
           <a:bodyPr wrap="square" rtlCol="0" anchor="ctr"/>
           <a:lstStyle/>
           <a:p>
-            <a:pPr algn="l" indent="0" marL="0">
+            <a:pPr marL="0" indent="0" algn="l">
               <a:buNone/>
             </a:pPr>
             <a:r>
@@ -10796,7 +10865,7 @@
           <a:bodyPr wrap="square" rtlCol="0" anchor="ctr"/>
           <a:lstStyle/>
           <a:p>
-            <a:pPr algn="l" indent="0" marL="0">
+            <a:pPr marL="0" indent="0" algn="l">
               <a:buNone/>
             </a:pPr>
             <a:r>
@@ -10830,6 +10899,7 @@
         <a:solidFill>
           <a:srgbClr val="FFFFFF"/>
         </a:solidFill>
+        <a:effectLst/>
       </p:bgPr>
     </p:bg>
     <p:spTree>
@@ -10870,6 +10940,13 @@
             <a:prstDash val="solid"/>
           </a:ln>
         </p:spPr>
+        <p:txBody>
+          <a:bodyPr/>
+          <a:lstStyle/>
+          <a:p>
+            <a:endParaRPr lang="en-US"/>
+          </a:p>
+        </p:txBody>
       </p:sp>
       <p:sp>
         <p:nvSpPr>
@@ -10895,6 +10972,13 @@
             <a:prstDash val="solid"/>
           </a:ln>
         </p:spPr>
+        <p:txBody>
+          <a:bodyPr/>
+          <a:lstStyle/>
+          <a:p>
+            <a:endParaRPr lang="en-US"/>
+          </a:p>
+        </p:txBody>
       </p:sp>
       <p:sp>
         <p:nvSpPr>
@@ -10917,7 +11001,7 @@
           <a:bodyPr wrap="square" rtlCol="0" anchor="ctr"/>
           <a:lstStyle/>
           <a:p>
-            <a:pPr indent="0" marL="0">
+            <a:pPr marL="0" indent="0">
               <a:buNone/>
             </a:pPr>
             <a:r>
@@ -10956,7 +11040,7 @@
           <a:bodyPr wrap="square" rtlCol="0" anchor="ctr"/>
           <a:lstStyle/>
           <a:p>
-            <a:pPr algn="ctr" indent="0" marL="0">
+            <a:pPr marL="0" indent="0" algn="ctr">
               <a:buNone/>
             </a:pPr>
             <a:r>
@@ -10995,7 +11079,7 @@
           <a:bodyPr wrap="square" lIns="0" tIns="0" rIns="0" bIns="0" rtlCol="0" anchor="ctr"/>
           <a:lstStyle/>
           <a:p>
-            <a:pPr algn="l" indent="0" marL="0">
+            <a:pPr marL="0" indent="0" algn="l">
               <a:buNone/>
             </a:pPr>
             <a:r>
@@ -11037,13 +11121,20 @@
             <a:prstDash val="solid"/>
           </a:ln>
           <a:effectLst>
-            <a:outerShdw sx="100000" sy="100000" kx="0" ky="0" algn="bl" rotWithShape="0" blurRad="101600" dist="38100" dir="8100000">
+            <a:outerShdw blurRad="101600" dist="38100" dir="8100000" algn="bl" rotWithShape="0">
               <a:srgbClr val="000000">
                 <a:alpha val="18000"/>
               </a:srgbClr>
             </a:outerShdw>
           </a:effectLst>
         </p:spPr>
+        <p:txBody>
+          <a:bodyPr/>
+          <a:lstStyle/>
+          <a:p>
+            <a:endParaRPr lang="en-US"/>
+          </a:p>
+        </p:txBody>
       </p:sp>
       <p:sp>
         <p:nvSpPr>
@@ -11066,7 +11157,7 @@
           <a:bodyPr wrap="square" rtlCol="0" anchor="ctr"/>
           <a:lstStyle/>
           <a:p>
-            <a:pPr indent="0" marL="0">
+            <a:pPr marL="0" indent="0">
               <a:buNone/>
             </a:pPr>
             <a:r>
@@ -11235,13 +11326,20 @@
             <a:prstDash val="solid"/>
           </a:ln>
           <a:effectLst>
-            <a:outerShdw sx="100000" sy="100000" kx="0" ky="0" algn="bl" rotWithShape="0" blurRad="101600" dist="38100" dir="8100000">
+            <a:outerShdw blurRad="101600" dist="38100" dir="8100000" algn="bl" rotWithShape="0">
               <a:srgbClr val="000000">
                 <a:alpha val="18000"/>
               </a:srgbClr>
             </a:outerShdw>
           </a:effectLst>
         </p:spPr>
+        <p:txBody>
+          <a:bodyPr/>
+          <a:lstStyle/>
+          <a:p>
+            <a:endParaRPr lang="en-US"/>
+          </a:p>
+        </p:txBody>
       </p:sp>
       <p:sp>
         <p:nvSpPr>
@@ -11264,7 +11362,7 @@
           <a:bodyPr wrap="square" lIns="0" tIns="0" rIns="0" bIns="0" rtlCol="0" anchor="ctr"/>
           <a:lstStyle/>
           <a:p>
-            <a:pPr algn="ctr" indent="0" marL="0">
+            <a:pPr marL="0" indent="0" algn="ctr">
               <a:buNone/>
             </a:pPr>
             <a:r>
@@ -11303,7 +11401,7 @@
           <a:bodyPr wrap="square" lIns="0" tIns="0" rIns="0" bIns="0" rtlCol="0" anchor="ctr"/>
           <a:lstStyle/>
           <a:p>
-            <a:pPr algn="ctr" indent="0" marL="0">
+            <a:pPr marL="0" indent="0" algn="ctr">
               <a:buNone/>
             </a:pPr>
             <a:r>
@@ -11345,13 +11443,20 @@
             <a:prstDash val="solid"/>
           </a:ln>
           <a:effectLst>
-            <a:outerShdw sx="100000" sy="100000" kx="0" ky="0" algn="bl" rotWithShape="0" blurRad="101600" dist="38100" dir="8100000">
+            <a:outerShdw blurRad="101600" dist="38100" dir="8100000" algn="bl" rotWithShape="0">
               <a:srgbClr val="000000">
                 <a:alpha val="18000"/>
               </a:srgbClr>
             </a:outerShdw>
           </a:effectLst>
         </p:spPr>
+        <p:txBody>
+          <a:bodyPr/>
+          <a:lstStyle/>
+          <a:p>
+            <a:endParaRPr lang="en-US"/>
+          </a:p>
+        </p:txBody>
       </p:sp>
       <p:sp>
         <p:nvSpPr>
@@ -11374,7 +11479,7 @@
           <a:bodyPr wrap="square" lIns="0" tIns="0" rIns="0" bIns="0" rtlCol="0" anchor="ctr"/>
           <a:lstStyle/>
           <a:p>
-            <a:pPr algn="ctr" indent="0" marL="0">
+            <a:pPr marL="0" indent="0" algn="ctr">
               <a:buNone/>
             </a:pPr>
             <a:r>
@@ -11413,7 +11518,7 @@
           <a:bodyPr wrap="square" lIns="0" tIns="0" rIns="0" bIns="0" rtlCol="0" anchor="ctr"/>
           <a:lstStyle/>
           <a:p>
-            <a:pPr algn="ctr" indent="0" marL="0">
+            <a:pPr marL="0" indent="0" algn="ctr">
               <a:buNone/>
             </a:pPr>
             <a:r>
@@ -11455,13 +11560,20 @@
             <a:prstDash val="solid"/>
           </a:ln>
           <a:effectLst>
-            <a:outerShdw sx="100000" sy="100000" kx="0" ky="0" algn="bl" rotWithShape="0" blurRad="101600" dist="38100" dir="8100000">
+            <a:outerShdw blurRad="101600" dist="38100" dir="8100000" algn="bl" rotWithShape="0">
               <a:srgbClr val="000000">
                 <a:alpha val="18000"/>
               </a:srgbClr>
             </a:outerShdw>
           </a:effectLst>
         </p:spPr>
+        <p:txBody>
+          <a:bodyPr/>
+          <a:lstStyle/>
+          <a:p>
+            <a:endParaRPr lang="en-US"/>
+          </a:p>
+        </p:txBody>
       </p:sp>
       <p:sp>
         <p:nvSpPr>
@@ -11484,7 +11596,7 @@
           <a:bodyPr wrap="square" lIns="0" tIns="0" rIns="0" bIns="0" rtlCol="0" anchor="ctr"/>
           <a:lstStyle/>
           <a:p>
-            <a:pPr algn="ctr" indent="0" marL="0">
+            <a:pPr marL="0" indent="0" algn="ctr">
               <a:buNone/>
             </a:pPr>
             <a:r>
@@ -11523,7 +11635,7 @@
           <a:bodyPr wrap="square" lIns="0" tIns="0" rIns="0" bIns="0" rtlCol="0" anchor="ctr"/>
           <a:lstStyle/>
           <a:p>
-            <a:pPr algn="ctr" indent="0" marL="0">
+            <a:pPr marL="0" indent="0" algn="ctr">
               <a:buNone/>
             </a:pPr>
             <a:r>
@@ -11565,13 +11677,20 @@
             <a:prstDash val="solid"/>
           </a:ln>
           <a:effectLst>
-            <a:outerShdw sx="100000" sy="100000" kx="0" ky="0" algn="bl" rotWithShape="0" blurRad="101600" dist="38100" dir="8100000">
+            <a:outerShdw blurRad="101600" dist="38100" dir="8100000" algn="bl" rotWithShape="0">
               <a:srgbClr val="000000">
                 <a:alpha val="18000"/>
               </a:srgbClr>
             </a:outerShdw>
           </a:effectLst>
         </p:spPr>
+        <p:txBody>
+          <a:bodyPr/>
+          <a:lstStyle/>
+          <a:p>
+            <a:endParaRPr lang="en-US"/>
+          </a:p>
+        </p:txBody>
       </p:sp>
       <p:sp>
         <p:nvSpPr>
@@ -11594,7 +11713,7 @@
           <a:bodyPr wrap="square" lIns="0" tIns="0" rIns="0" bIns="0" rtlCol="0" anchor="ctr"/>
           <a:lstStyle/>
           <a:p>
-            <a:pPr algn="ctr" indent="0" marL="0">
+            <a:pPr marL="0" indent="0" algn="ctr">
               <a:buNone/>
             </a:pPr>
             <a:r>
@@ -11633,7 +11752,7 @@
           <a:bodyPr wrap="square" lIns="0" tIns="0" rIns="0" bIns="0" rtlCol="0" anchor="ctr"/>
           <a:lstStyle/>
           <a:p>
-            <a:pPr algn="ctr" indent="0" marL="0">
+            <a:pPr marL="0" indent="0" algn="ctr">
               <a:buNone/>
             </a:pPr>
             <a:r>
@@ -11675,13 +11794,20 @@
             <a:prstDash val="solid"/>
           </a:ln>
           <a:effectLst>
-            <a:outerShdw sx="100000" sy="100000" kx="0" ky="0" algn="bl" rotWithShape="0" blurRad="101600" dist="38100" dir="8100000">
+            <a:outerShdw blurRad="101600" dist="38100" dir="8100000" algn="bl" rotWithShape="0">
               <a:srgbClr val="000000">
                 <a:alpha val="18000"/>
               </a:srgbClr>
             </a:outerShdw>
           </a:effectLst>
         </p:spPr>
+        <p:txBody>
+          <a:bodyPr/>
+          <a:lstStyle/>
+          <a:p>
+            <a:endParaRPr lang="en-US"/>
+          </a:p>
+        </p:txBody>
       </p:sp>
       <p:sp>
         <p:nvSpPr>
@@ -11704,7 +11830,7 @@
           <a:bodyPr wrap="square" lIns="0" tIns="0" rIns="0" bIns="0" rtlCol="0" anchor="ctr"/>
           <a:lstStyle/>
           <a:p>
-            <a:pPr algn="ctr" indent="0" marL="0">
+            <a:pPr marL="0" indent="0" algn="ctr">
               <a:buNone/>
             </a:pPr>
             <a:r>
@@ -11743,7 +11869,7 @@
           <a:bodyPr wrap="square" lIns="0" tIns="0" rIns="0" bIns="0" rtlCol="0" anchor="ctr"/>
           <a:lstStyle/>
           <a:p>
-            <a:pPr algn="ctr" indent="0" marL="0">
+            <a:pPr marL="0" indent="0" algn="ctr">
               <a:buNone/>
             </a:pPr>
             <a:r>
@@ -11777,6 +11903,7 @@
         <a:solidFill>
           <a:srgbClr val="1E3A5F"/>
         </a:solidFill>
+        <a:effectLst/>
       </p:bgPr>
     </p:bg>
     <p:spTree>
@@ -11817,6 +11944,13 @@
             <a:prstDash val="solid"/>
           </a:ln>
         </p:spPr>
+        <p:txBody>
+          <a:bodyPr/>
+          <a:lstStyle/>
+          <a:p>
+            <a:endParaRPr lang="en-US"/>
+          </a:p>
+        </p:txBody>
       </p:sp>
       <p:sp>
         <p:nvSpPr>
@@ -11839,7 +11973,7 @@
           <a:bodyPr wrap="square" rtlCol="0" anchor="ctr"/>
           <a:lstStyle/>
           <a:p>
-            <a:pPr algn="l" indent="0" marL="0">
+            <a:pPr marL="0" indent="0" algn="l">
               <a:buNone/>
             </a:pPr>
             <a:r>
@@ -11878,7 +12012,7 @@
           <a:bodyPr wrap="square" rtlCol="0" anchor="ctr"/>
           <a:lstStyle/>
           <a:p>
-            <a:pPr algn="l" indent="0" marL="0">
+            <a:pPr marL="0" indent="0" algn="l">
               <a:buNone/>
             </a:pPr>
             <a:r>
@@ -11912,6 +12046,7 @@
         <a:solidFill>
           <a:srgbClr val="FFFFFF"/>
         </a:solidFill>
+        <a:effectLst/>
       </p:bgPr>
     </p:bg>
     <p:spTree>
@@ -11952,6 +12087,13 @@
             <a:prstDash val="solid"/>
           </a:ln>
         </p:spPr>
+        <p:txBody>
+          <a:bodyPr/>
+          <a:lstStyle/>
+          <a:p>
+            <a:endParaRPr lang="en-US"/>
+          </a:p>
+        </p:txBody>
       </p:sp>
       <p:sp>
         <p:nvSpPr>
@@ -11977,6 +12119,13 @@
             <a:prstDash val="solid"/>
           </a:ln>
         </p:spPr>
+        <p:txBody>
+          <a:bodyPr/>
+          <a:lstStyle/>
+          <a:p>
+            <a:endParaRPr lang="en-US"/>
+          </a:p>
+        </p:txBody>
       </p:sp>
       <p:sp>
         <p:nvSpPr>
@@ -11999,7 +12148,7 @@
           <a:bodyPr wrap="square" rtlCol="0" anchor="ctr"/>
           <a:lstStyle/>
           <a:p>
-            <a:pPr indent="0" marL="0">
+            <a:pPr marL="0" indent="0">
               <a:buNone/>
             </a:pPr>
             <a:r>
@@ -12038,7 +12187,7 @@
           <a:bodyPr wrap="square" rtlCol="0" anchor="ctr"/>
           <a:lstStyle/>
           <a:p>
-            <a:pPr algn="ctr" indent="0" marL="0">
+            <a:pPr marL="0" indent="0" algn="ctr">
               <a:buNone/>
             </a:pPr>
             <a:r>
@@ -12077,7 +12226,7 @@
           <a:bodyPr wrap="square" lIns="0" tIns="0" rIns="0" bIns="0" rtlCol="0" anchor="ctr"/>
           <a:lstStyle/>
           <a:p>
-            <a:pPr algn="l" indent="0" marL="0">
+            <a:pPr marL="0" indent="0" algn="l">
               <a:buNone/>
             </a:pPr>
             <a:r>
@@ -12119,13 +12268,20 @@
             <a:prstDash val="solid"/>
           </a:ln>
           <a:effectLst>
-            <a:outerShdw sx="100000" sy="100000" kx="0" ky="0" algn="bl" rotWithShape="0" blurRad="101600" dist="38100" dir="8100000">
+            <a:outerShdw blurRad="101600" dist="38100" dir="8100000" algn="bl" rotWithShape="0">
               <a:srgbClr val="000000">
                 <a:alpha val="18000"/>
               </a:srgbClr>
             </a:outerShdw>
           </a:effectLst>
         </p:spPr>
+        <p:txBody>
+          <a:bodyPr/>
+          <a:lstStyle/>
+          <a:p>
+            <a:endParaRPr lang="en-US"/>
+          </a:p>
+        </p:txBody>
       </p:sp>
       <p:sp>
         <p:nvSpPr>
@@ -12151,6 +12307,13 @@
             <a:prstDash val="solid"/>
           </a:ln>
         </p:spPr>
+        <p:txBody>
+          <a:bodyPr/>
+          <a:lstStyle/>
+          <a:p>
+            <a:endParaRPr lang="en-US"/>
+          </a:p>
+        </p:txBody>
       </p:sp>
       <p:sp>
         <p:nvSpPr>
@@ -12173,7 +12336,7 @@
           <a:bodyPr wrap="square" lIns="0" tIns="0" rIns="0" bIns="0" rtlCol="0" anchor="ctr"/>
           <a:lstStyle/>
           <a:p>
-            <a:pPr indent="0" marL="0">
+            <a:pPr marL="0" indent="0">
               <a:buNone/>
             </a:pPr>
             <a:r>
@@ -12212,7 +12375,7 @@
           <a:bodyPr wrap="square" lIns="0" tIns="0" rIns="0" bIns="0" rtlCol="0" anchor="ctr"/>
           <a:lstStyle/>
           <a:p>
-            <a:pPr indent="0" marL="0">
+            <a:pPr marL="0" indent="0">
               <a:buNone/>
             </a:pPr>
             <a:r>
@@ -12254,13 +12417,20 @@
             <a:prstDash val="solid"/>
           </a:ln>
           <a:effectLst>
-            <a:outerShdw sx="100000" sy="100000" kx="0" ky="0" algn="bl" rotWithShape="0" blurRad="101600" dist="38100" dir="8100000">
+            <a:outerShdw blurRad="101600" dist="38100" dir="8100000" algn="bl" rotWithShape="0">
               <a:srgbClr val="000000">
                 <a:alpha val="18000"/>
               </a:srgbClr>
             </a:outerShdw>
           </a:effectLst>
         </p:spPr>
+        <p:txBody>
+          <a:bodyPr/>
+          <a:lstStyle/>
+          <a:p>
+            <a:endParaRPr lang="en-US"/>
+          </a:p>
+        </p:txBody>
       </p:sp>
       <p:sp>
         <p:nvSpPr>
@@ -12286,6 +12456,13 @@
             <a:prstDash val="solid"/>
           </a:ln>
         </p:spPr>
+        <p:txBody>
+          <a:bodyPr/>
+          <a:lstStyle/>
+          <a:p>
+            <a:endParaRPr lang="en-US"/>
+          </a:p>
+        </p:txBody>
       </p:sp>
       <p:sp>
         <p:nvSpPr>
@@ -12308,7 +12485,7 @@
           <a:bodyPr wrap="square" lIns="0" tIns="0" rIns="0" bIns="0" rtlCol="0" anchor="ctr"/>
           <a:lstStyle/>
           <a:p>
-            <a:pPr indent="0" marL="0">
+            <a:pPr marL="0" indent="0">
               <a:buNone/>
             </a:pPr>
             <a:r>
@@ -12347,7 +12524,7 @@
           <a:bodyPr wrap="square" lIns="0" tIns="0" rIns="0" bIns="0" rtlCol="0" anchor="ctr"/>
           <a:lstStyle/>
           <a:p>
-            <a:pPr indent="0" marL="0">
+            <a:pPr marL="0" indent="0">
               <a:buNone/>
             </a:pPr>
             <a:r>
@@ -12389,13 +12566,20 @@
             <a:prstDash val="solid"/>
           </a:ln>
           <a:effectLst>
-            <a:outerShdw sx="100000" sy="100000" kx="0" ky="0" algn="bl" rotWithShape="0" blurRad="101600" dist="38100" dir="8100000">
+            <a:outerShdw blurRad="101600" dist="38100" dir="8100000" algn="bl" rotWithShape="0">
               <a:srgbClr val="000000">
                 <a:alpha val="18000"/>
               </a:srgbClr>
             </a:outerShdw>
           </a:effectLst>
         </p:spPr>
+        <p:txBody>
+          <a:bodyPr/>
+          <a:lstStyle/>
+          <a:p>
+            <a:endParaRPr lang="en-US"/>
+          </a:p>
+        </p:txBody>
       </p:sp>
       <p:sp>
         <p:nvSpPr>
@@ -12421,6 +12605,13 @@
             <a:prstDash val="solid"/>
           </a:ln>
         </p:spPr>
+        <p:txBody>
+          <a:bodyPr/>
+          <a:lstStyle/>
+          <a:p>
+            <a:endParaRPr lang="en-US"/>
+          </a:p>
+        </p:txBody>
       </p:sp>
       <p:sp>
         <p:nvSpPr>
@@ -12443,7 +12634,7 @@
           <a:bodyPr wrap="square" lIns="0" tIns="0" rIns="0" bIns="0" rtlCol="0" anchor="ctr"/>
           <a:lstStyle/>
           <a:p>
-            <a:pPr indent="0" marL="0">
+            <a:pPr marL="0" indent="0">
               <a:buNone/>
             </a:pPr>
             <a:r>
@@ -12482,7 +12673,7 @@
           <a:bodyPr wrap="square" lIns="0" tIns="0" rIns="0" bIns="0" rtlCol="0" anchor="ctr"/>
           <a:lstStyle/>
           <a:p>
-            <a:pPr indent="0" marL="0">
+            <a:pPr marL="0" indent="0">
               <a:buNone/>
             </a:pPr>
             <a:r>
@@ -12524,13 +12715,20 @@
             <a:prstDash val="solid"/>
           </a:ln>
           <a:effectLst>
-            <a:outerShdw sx="100000" sy="100000" kx="0" ky="0" algn="bl" rotWithShape="0" blurRad="101600" dist="38100" dir="8100000">
+            <a:outerShdw blurRad="101600" dist="38100" dir="8100000" algn="bl" rotWithShape="0">
               <a:srgbClr val="000000">
                 <a:alpha val="18000"/>
               </a:srgbClr>
             </a:outerShdw>
           </a:effectLst>
         </p:spPr>
+        <p:txBody>
+          <a:bodyPr/>
+          <a:lstStyle/>
+          <a:p>
+            <a:endParaRPr lang="en-US"/>
+          </a:p>
+        </p:txBody>
       </p:sp>
       <p:sp>
         <p:nvSpPr>
@@ -12556,6 +12754,13 @@
             <a:prstDash val="solid"/>
           </a:ln>
         </p:spPr>
+        <p:txBody>
+          <a:bodyPr/>
+          <a:lstStyle/>
+          <a:p>
+            <a:endParaRPr lang="en-US"/>
+          </a:p>
+        </p:txBody>
       </p:sp>
       <p:sp>
         <p:nvSpPr>
@@ -12578,7 +12783,7 @@
           <a:bodyPr wrap="square" lIns="0" tIns="0" rIns="0" bIns="0" rtlCol="0" anchor="ctr"/>
           <a:lstStyle/>
           <a:p>
-            <a:pPr indent="0" marL="0">
+            <a:pPr marL="0" indent="0">
               <a:buNone/>
             </a:pPr>
             <a:r>
@@ -12617,7 +12822,7 @@
           <a:bodyPr wrap="square" lIns="0" tIns="0" rIns="0" bIns="0" rtlCol="0" anchor="ctr"/>
           <a:lstStyle/>
           <a:p>
-            <a:pPr indent="0" marL="0">
+            <a:pPr marL="0" indent="0">
               <a:buNone/>
             </a:pPr>
             <a:r>
@@ -12651,6 +12856,7 @@
         <a:solidFill>
           <a:srgbClr val="FFFFFF"/>
         </a:solidFill>
+        <a:effectLst/>
       </p:bgPr>
     </p:bg>
     <p:spTree>
@@ -12691,6 +12897,13 @@
             <a:prstDash val="solid"/>
           </a:ln>
         </p:spPr>
+        <p:txBody>
+          <a:bodyPr/>
+          <a:lstStyle/>
+          <a:p>
+            <a:endParaRPr lang="en-US"/>
+          </a:p>
+        </p:txBody>
       </p:sp>
       <p:sp>
         <p:nvSpPr>
@@ -12716,6 +12929,13 @@
             <a:prstDash val="solid"/>
           </a:ln>
         </p:spPr>
+        <p:txBody>
+          <a:bodyPr/>
+          <a:lstStyle/>
+          <a:p>
+            <a:endParaRPr lang="en-US"/>
+          </a:p>
+        </p:txBody>
       </p:sp>
       <p:sp>
         <p:nvSpPr>
@@ -12738,7 +12958,7 @@
           <a:bodyPr wrap="square" rtlCol="0" anchor="ctr"/>
           <a:lstStyle/>
           <a:p>
-            <a:pPr indent="0" marL="0">
+            <a:pPr marL="0" indent="0">
               <a:buNone/>
             </a:pPr>
             <a:r>
@@ -12777,7 +12997,7 @@
           <a:bodyPr wrap="square" rtlCol="0" anchor="ctr"/>
           <a:lstStyle/>
           <a:p>
-            <a:pPr algn="ctr" indent="0" marL="0">
+            <a:pPr marL="0" indent="0" algn="ctr">
               <a:buNone/>
             </a:pPr>
             <a:r>
@@ -12816,7 +13036,7 @@
           <a:bodyPr wrap="square" lIns="0" tIns="0" rIns="0" bIns="0" rtlCol="0" anchor="ctr"/>
           <a:lstStyle/>
           <a:p>
-            <a:pPr algn="l" indent="0" marL="0">
+            <a:pPr marL="0" indent="0" algn="l">
               <a:buNone/>
             </a:pPr>
             <a:r>
@@ -12858,6 +13078,13 @@
             <a:prstDash val="solid"/>
           </a:ln>
         </p:spPr>
+        <p:txBody>
+          <a:bodyPr/>
+          <a:lstStyle/>
+          <a:p>
+            <a:endParaRPr lang="en-US"/>
+          </a:p>
+        </p:txBody>
       </p:sp>
       <p:sp>
         <p:nvSpPr>
@@ -12880,7 +13107,7 @@
           <a:bodyPr wrap="square" lIns="0" tIns="0" rIns="0" bIns="0" rtlCol="0" anchor="ctr"/>
           <a:lstStyle/>
           <a:p>
-            <a:pPr indent="0" marL="0">
+            <a:pPr marL="0" indent="0">
               <a:buNone/>
             </a:pPr>
             <a:r>
@@ -12919,7 +13146,7 @@
           <a:bodyPr wrap="square" lIns="0" tIns="0" rIns="0" bIns="0" rtlCol="0" anchor="ctr"/>
           <a:lstStyle/>
           <a:p>
-            <a:pPr indent="0" marL="0">
+            <a:pPr marL="0" indent="0">
               <a:buNone/>
             </a:pPr>
             <a:r>
@@ -12961,6 +13188,13 @@
             <a:prstDash val="solid"/>
           </a:ln>
         </p:spPr>
+        <p:txBody>
+          <a:bodyPr/>
+          <a:lstStyle/>
+          <a:p>
+            <a:endParaRPr lang="en-US"/>
+          </a:p>
+        </p:txBody>
       </p:sp>
       <p:sp>
         <p:nvSpPr>
@@ -12983,7 +13217,7 @@
           <a:bodyPr wrap="square" lIns="0" tIns="0" rIns="0" bIns="0" rtlCol="0" anchor="ctr"/>
           <a:lstStyle/>
           <a:p>
-            <a:pPr indent="0" marL="0">
+            <a:pPr marL="0" indent="0">
               <a:buNone/>
             </a:pPr>
             <a:r>
@@ -13022,7 +13256,7 @@
           <a:bodyPr wrap="square" lIns="0" tIns="0" rIns="0" bIns="0" rtlCol="0" anchor="ctr"/>
           <a:lstStyle/>
           <a:p>
-            <a:pPr indent="0" marL="0">
+            <a:pPr marL="0" indent="0">
               <a:buNone/>
             </a:pPr>
             <a:r>
@@ -13064,6 +13298,13 @@
             <a:prstDash val="solid"/>
           </a:ln>
         </p:spPr>
+        <p:txBody>
+          <a:bodyPr/>
+          <a:lstStyle/>
+          <a:p>
+            <a:endParaRPr lang="en-US"/>
+          </a:p>
+        </p:txBody>
       </p:sp>
       <p:sp>
         <p:nvSpPr>
@@ -13086,7 +13327,7 @@
           <a:bodyPr wrap="square" lIns="0" tIns="0" rIns="0" bIns="0" rtlCol="0" anchor="ctr"/>
           <a:lstStyle/>
           <a:p>
-            <a:pPr indent="0" marL="0">
+            <a:pPr marL="0" indent="0">
               <a:buNone/>
             </a:pPr>
             <a:r>
@@ -13125,7 +13366,7 @@
           <a:bodyPr wrap="square" lIns="0" tIns="0" rIns="0" bIns="0" rtlCol="0" anchor="ctr"/>
           <a:lstStyle/>
           <a:p>
-            <a:pPr indent="0" marL="0">
+            <a:pPr marL="0" indent="0">
               <a:buNone/>
             </a:pPr>
             <a:r>
@@ -13167,6 +13408,13 @@
             <a:prstDash val="solid"/>
           </a:ln>
         </p:spPr>
+        <p:txBody>
+          <a:bodyPr/>
+          <a:lstStyle/>
+          <a:p>
+            <a:endParaRPr lang="en-US"/>
+          </a:p>
+        </p:txBody>
       </p:sp>
       <p:sp>
         <p:nvSpPr>
@@ -13189,7 +13437,7 @@
           <a:bodyPr wrap="square" lIns="0" tIns="0" rIns="0" bIns="0" rtlCol="0" anchor="ctr"/>
           <a:lstStyle/>
           <a:p>
-            <a:pPr indent="0" marL="0">
+            <a:pPr marL="0" indent="0">
               <a:buNone/>
             </a:pPr>
             <a:r>
@@ -13228,7 +13476,7 @@
           <a:bodyPr wrap="square" lIns="0" tIns="0" rIns="0" bIns="0" rtlCol="0" anchor="ctr"/>
           <a:lstStyle/>
           <a:p>
-            <a:pPr indent="0" marL="0">
+            <a:pPr marL="0" indent="0">
               <a:buNone/>
             </a:pPr>
             <a:r>
@@ -13270,6 +13518,13 @@
             <a:prstDash val="solid"/>
           </a:ln>
         </p:spPr>
+        <p:txBody>
+          <a:bodyPr/>
+          <a:lstStyle/>
+          <a:p>
+            <a:endParaRPr lang="en-US"/>
+          </a:p>
+        </p:txBody>
       </p:sp>
       <p:sp>
         <p:nvSpPr>
@@ -13292,7 +13547,7 @@
           <a:bodyPr wrap="square" lIns="0" tIns="0" rIns="0" bIns="0" rtlCol="0" anchor="ctr"/>
           <a:lstStyle/>
           <a:p>
-            <a:pPr indent="0" marL="0">
+            <a:pPr marL="0" indent="0">
               <a:buNone/>
             </a:pPr>
             <a:r>
@@ -13331,7 +13586,7 @@
           <a:bodyPr wrap="square" lIns="0" tIns="0" rIns="0" bIns="0" rtlCol="0" anchor="ctr"/>
           <a:lstStyle/>
           <a:p>
-            <a:pPr indent="0" marL="0">
+            <a:pPr marL="0" indent="0">
               <a:buNone/>
             </a:pPr>
             <a:r>
@@ -13373,6 +13628,13 @@
             <a:prstDash val="solid"/>
           </a:ln>
         </p:spPr>
+        <p:txBody>
+          <a:bodyPr/>
+          <a:lstStyle/>
+          <a:p>
+            <a:endParaRPr lang="en-US"/>
+          </a:p>
+        </p:txBody>
       </p:sp>
       <p:sp>
         <p:nvSpPr>
@@ -13395,7 +13657,7 @@
           <a:bodyPr wrap="square" lIns="0" tIns="0" rIns="0" bIns="0" rtlCol="0" anchor="ctr"/>
           <a:lstStyle/>
           <a:p>
-            <a:pPr indent="0" marL="0">
+            <a:pPr marL="0" indent="0">
               <a:buNone/>
             </a:pPr>
             <a:r>
@@ -13434,7 +13696,7 @@
           <a:bodyPr wrap="square" lIns="0" tIns="0" rIns="0" bIns="0" rtlCol="0" anchor="ctr"/>
           <a:lstStyle/>
           <a:p>
-            <a:pPr indent="0" marL="0">
+            <a:pPr marL="0" indent="0">
               <a:buNone/>
             </a:pPr>
             <a:r>
@@ -13476,6 +13738,13 @@
             <a:prstDash val="solid"/>
           </a:ln>
         </p:spPr>
+        <p:txBody>
+          <a:bodyPr/>
+          <a:lstStyle/>
+          <a:p>
+            <a:endParaRPr lang="en-US"/>
+          </a:p>
+        </p:txBody>
       </p:sp>
       <p:sp>
         <p:nvSpPr>
@@ -13498,7 +13767,7 @@
           <a:bodyPr wrap="square" lIns="0" tIns="0" rIns="0" bIns="0" rtlCol="0" anchor="ctr"/>
           <a:lstStyle/>
           <a:p>
-            <a:pPr indent="0" marL="0">
+            <a:pPr marL="0" indent="0">
               <a:buNone/>
             </a:pPr>
             <a:r>
@@ -13537,7 +13806,7 @@
           <a:bodyPr wrap="square" lIns="0" tIns="0" rIns="0" bIns="0" rtlCol="0" anchor="ctr"/>
           <a:lstStyle/>
           <a:p>
-            <a:pPr indent="0" marL="0">
+            <a:pPr marL="0" indent="0">
               <a:buNone/>
             </a:pPr>
             <a:r>
@@ -13579,6 +13848,13 @@
             <a:prstDash val="solid"/>
           </a:ln>
         </p:spPr>
+        <p:txBody>
+          <a:bodyPr/>
+          <a:lstStyle/>
+          <a:p>
+            <a:endParaRPr lang="en-US"/>
+          </a:p>
+        </p:txBody>
       </p:sp>
       <p:sp>
         <p:nvSpPr>
@@ -13601,7 +13877,7 @@
           <a:bodyPr wrap="square" lIns="0" tIns="0" rIns="0" bIns="0" rtlCol="0" anchor="ctr"/>
           <a:lstStyle/>
           <a:p>
-            <a:pPr indent="0" marL="0">
+            <a:pPr marL="0" indent="0">
               <a:buNone/>
             </a:pPr>
             <a:r>
@@ -13640,7 +13916,7 @@
           <a:bodyPr wrap="square" lIns="0" tIns="0" rIns="0" bIns="0" rtlCol="0" anchor="ctr"/>
           <a:lstStyle/>
           <a:p>
-            <a:pPr indent="0" marL="0">
+            <a:pPr marL="0" indent="0">
               <a:buNone/>
             </a:pPr>
             <a:r>
@@ -13674,6 +13950,7 @@
         <a:solidFill>
           <a:srgbClr val="1E3A5F"/>
         </a:solidFill>
+        <a:effectLst/>
       </p:bgPr>
     </p:bg>
     <p:spTree>
@@ -13714,6 +13991,13 @@
             <a:prstDash val="solid"/>
           </a:ln>
         </p:spPr>
+        <p:txBody>
+          <a:bodyPr/>
+          <a:lstStyle/>
+          <a:p>
+            <a:endParaRPr lang="en-US"/>
+          </a:p>
+        </p:txBody>
       </p:sp>
       <p:sp>
         <p:nvSpPr>
@@ -13736,7 +14020,7 @@
           <a:bodyPr wrap="square" rtlCol="0" anchor="ctr"/>
           <a:lstStyle/>
           <a:p>
-            <a:pPr algn="l" indent="0" marL="0">
+            <a:pPr marL="0" indent="0" algn="l">
               <a:buNone/>
             </a:pPr>
             <a:r>
@@ -13775,7 +14059,7 @@
           <a:bodyPr wrap="square" rtlCol="0" anchor="ctr"/>
           <a:lstStyle/>
           <a:p>
-            <a:pPr algn="l" indent="0" marL="0">
+            <a:pPr marL="0" indent="0" algn="l">
               <a:buNone/>
             </a:pPr>
             <a:r>
@@ -13809,6 +14093,7 @@
         <a:solidFill>
           <a:srgbClr val="FFFFFF"/>
         </a:solidFill>
+        <a:effectLst/>
       </p:bgPr>
     </p:bg>
     <p:spTree>
@@ -13849,6 +14134,13 @@
             <a:prstDash val="solid"/>
           </a:ln>
         </p:spPr>
+        <p:txBody>
+          <a:bodyPr/>
+          <a:lstStyle/>
+          <a:p>
+            <a:endParaRPr lang="en-US"/>
+          </a:p>
+        </p:txBody>
       </p:sp>
       <p:sp>
         <p:nvSpPr>
@@ -13874,6 +14166,13 @@
             <a:prstDash val="solid"/>
           </a:ln>
         </p:spPr>
+        <p:txBody>
+          <a:bodyPr/>
+          <a:lstStyle/>
+          <a:p>
+            <a:endParaRPr lang="en-US"/>
+          </a:p>
+        </p:txBody>
       </p:sp>
       <p:sp>
         <p:nvSpPr>
@@ -13896,7 +14195,7 @@
           <a:bodyPr wrap="square" rtlCol="0" anchor="ctr"/>
           <a:lstStyle/>
           <a:p>
-            <a:pPr indent="0" marL="0">
+            <a:pPr marL="0" indent="0">
               <a:buNone/>
             </a:pPr>
             <a:r>
@@ -13935,7 +14234,7 @@
           <a:bodyPr wrap="square" rtlCol="0" anchor="ctr"/>
           <a:lstStyle/>
           <a:p>
-            <a:pPr algn="ctr" indent="0" marL="0">
+            <a:pPr marL="0" indent="0" algn="ctr">
               <a:buNone/>
             </a:pPr>
             <a:r>
@@ -13974,7 +14273,7 @@
           <a:bodyPr wrap="square" lIns="0" tIns="0" rIns="0" bIns="0" rtlCol="0" anchor="ctr"/>
           <a:lstStyle/>
           <a:p>
-            <a:pPr algn="l" indent="0" marL="0">
+            <a:pPr marL="0" indent="0" algn="l">
               <a:buNone/>
             </a:pPr>
             <a:r>
@@ -14016,6 +14315,13 @@
             <a:prstDash val="solid"/>
           </a:ln>
         </p:spPr>
+        <p:txBody>
+          <a:bodyPr/>
+          <a:lstStyle/>
+          <a:p>
+            <a:endParaRPr lang="en-US"/>
+          </a:p>
+        </p:txBody>
       </p:sp>
       <p:sp>
         <p:nvSpPr>
@@ -14038,7 +14344,7 @@
           <a:bodyPr wrap="square" lIns="0" tIns="0" rIns="0" bIns="0" rtlCol="0" anchor="ctr"/>
           <a:lstStyle/>
           <a:p>
-            <a:pPr algn="ctr" indent="0" marL="0">
+            <a:pPr marL="0" indent="0" algn="ctr">
               <a:buNone/>
             </a:pPr>
             <a:r>
@@ -14080,6 +14386,13 @@
             <a:prstDash val="solid"/>
           </a:ln>
         </p:spPr>
+        <p:txBody>
+          <a:bodyPr/>
+          <a:lstStyle/>
+          <a:p>
+            <a:endParaRPr lang="en-US"/>
+          </a:p>
+        </p:txBody>
       </p:sp>
       <p:sp>
         <p:nvSpPr>
@@ -14102,7 +14415,7 @@
           <a:bodyPr wrap="square" lIns="0" tIns="0" rIns="0" bIns="0" rtlCol="0" anchor="ctr"/>
           <a:lstStyle/>
           <a:p>
-            <a:pPr indent="0" marL="0">
+            <a:pPr marL="0" indent="0">
               <a:buNone/>
             </a:pPr>
             <a:r>
@@ -14144,6 +14457,13 @@
             <a:prstDash val="solid"/>
           </a:ln>
         </p:spPr>
+        <p:txBody>
+          <a:bodyPr/>
+          <a:lstStyle/>
+          <a:p>
+            <a:endParaRPr lang="en-US"/>
+          </a:p>
+        </p:txBody>
       </p:sp>
       <p:sp>
         <p:nvSpPr>
@@ -14166,7 +14486,7 @@
           <a:bodyPr wrap="square" lIns="0" tIns="0" rIns="0" bIns="0" rtlCol="0" anchor="ctr"/>
           <a:lstStyle/>
           <a:p>
-            <a:pPr indent="0" marL="0">
+            <a:pPr marL="0" indent="0">
               <a:buNone/>
             </a:pPr>
             <a:r>
@@ -14208,6 +14528,13 @@
             <a:prstDash val="solid"/>
           </a:ln>
         </p:spPr>
+        <p:txBody>
+          <a:bodyPr/>
+          <a:lstStyle/>
+          <a:p>
+            <a:endParaRPr lang="en-US"/>
+          </a:p>
+        </p:txBody>
       </p:sp>
       <p:sp>
         <p:nvSpPr>
@@ -14230,7 +14557,7 @@
           <a:bodyPr wrap="square" lIns="0" tIns="0" rIns="0" bIns="0" rtlCol="0" anchor="ctr"/>
           <a:lstStyle/>
           <a:p>
-            <a:pPr indent="0" marL="0">
+            <a:pPr marL="0" indent="0">
               <a:buNone/>
             </a:pPr>
             <a:r>
@@ -14272,6 +14599,13 @@
             <a:prstDash val="solid"/>
           </a:ln>
         </p:spPr>
+        <p:txBody>
+          <a:bodyPr/>
+          <a:lstStyle/>
+          <a:p>
+            <a:endParaRPr lang="en-US"/>
+          </a:p>
+        </p:txBody>
       </p:sp>
       <p:sp>
         <p:nvSpPr>
@@ -14294,7 +14628,7 @@
           <a:bodyPr wrap="square" lIns="0" tIns="0" rIns="0" bIns="0" rtlCol="0" anchor="ctr"/>
           <a:lstStyle/>
           <a:p>
-            <a:pPr algn="ctr" indent="0" marL="0">
+            <a:pPr marL="0" indent="0" algn="ctr">
               <a:buNone/>
             </a:pPr>
             <a:r>
@@ -14336,6 +14670,13 @@
             <a:prstDash val="solid"/>
           </a:ln>
         </p:spPr>
+        <p:txBody>
+          <a:bodyPr/>
+          <a:lstStyle/>
+          <a:p>
+            <a:endParaRPr lang="en-US"/>
+          </a:p>
+        </p:txBody>
       </p:sp>
       <p:sp>
         <p:nvSpPr>
@@ -14358,7 +14699,7 @@
           <a:bodyPr wrap="square" lIns="0" tIns="0" rIns="0" bIns="0" rtlCol="0" anchor="ctr"/>
           <a:lstStyle/>
           <a:p>
-            <a:pPr indent="0" marL="0">
+            <a:pPr marL="0" indent="0">
               <a:buNone/>
             </a:pPr>
             <a:r>
@@ -14400,6 +14741,13 @@
             <a:prstDash val="solid"/>
           </a:ln>
         </p:spPr>
+        <p:txBody>
+          <a:bodyPr/>
+          <a:lstStyle/>
+          <a:p>
+            <a:endParaRPr lang="en-US"/>
+          </a:p>
+        </p:txBody>
       </p:sp>
       <p:sp>
         <p:nvSpPr>
@@ -14422,7 +14770,7 @@
           <a:bodyPr wrap="square" lIns="0" tIns="0" rIns="0" bIns="0" rtlCol="0" anchor="ctr"/>
           <a:lstStyle/>
           <a:p>
-            <a:pPr indent="0" marL="0">
+            <a:pPr marL="0" indent="0">
               <a:buNone/>
             </a:pPr>
             <a:r>
@@ -14464,6 +14812,13 @@
             <a:prstDash val="solid"/>
           </a:ln>
         </p:spPr>
+        <p:txBody>
+          <a:bodyPr/>
+          <a:lstStyle/>
+          <a:p>
+            <a:endParaRPr lang="en-US"/>
+          </a:p>
+        </p:txBody>
       </p:sp>
       <p:sp>
         <p:nvSpPr>
@@ -14486,7 +14841,7 @@
           <a:bodyPr wrap="square" lIns="0" tIns="0" rIns="0" bIns="0" rtlCol="0" anchor="ctr"/>
           <a:lstStyle/>
           <a:p>
-            <a:pPr indent="0" marL="0">
+            <a:pPr marL="0" indent="0">
               <a:buNone/>
             </a:pPr>
             <a:r>
@@ -14528,6 +14883,13 @@
             <a:prstDash val="solid"/>
           </a:ln>
         </p:spPr>
+        <p:txBody>
+          <a:bodyPr/>
+          <a:lstStyle/>
+          <a:p>
+            <a:endParaRPr lang="en-US"/>
+          </a:p>
+        </p:txBody>
       </p:sp>
       <p:sp>
         <p:nvSpPr>
@@ -14550,7 +14912,7 @@
           <a:bodyPr wrap="square" lIns="0" tIns="0" rIns="0" bIns="0" rtlCol="0" anchor="ctr"/>
           <a:lstStyle/>
           <a:p>
-            <a:pPr indent="0" marL="0">
+            <a:pPr marL="0" indent="0">
               <a:buNone/>
             </a:pPr>
             <a:r>
@@ -14592,6 +14954,13 @@
             <a:prstDash val="solid"/>
           </a:ln>
         </p:spPr>
+        <p:txBody>
+          <a:bodyPr/>
+          <a:lstStyle/>
+          <a:p>
+            <a:endParaRPr lang="en-US"/>
+          </a:p>
+        </p:txBody>
       </p:sp>
       <p:sp>
         <p:nvSpPr>
@@ -14614,7 +14983,7 @@
           <a:bodyPr wrap="square" lIns="0" tIns="0" rIns="0" bIns="0" rtlCol="0" anchor="ctr"/>
           <a:lstStyle/>
           <a:p>
-            <a:pPr indent="0" marL="0">
+            <a:pPr marL="0" indent="0">
               <a:buNone/>
             </a:pPr>
             <a:r>
@@ -14656,6 +15025,13 @@
             <a:prstDash val="solid"/>
           </a:ln>
         </p:spPr>
+        <p:txBody>
+          <a:bodyPr/>
+          <a:lstStyle/>
+          <a:p>
+            <a:endParaRPr lang="en-US"/>
+          </a:p>
+        </p:txBody>
       </p:sp>
       <p:sp>
         <p:nvSpPr>
@@ -14678,7 +15054,7 @@
           <a:bodyPr wrap="square" lIns="0" tIns="0" rIns="0" bIns="0" rtlCol="0" anchor="ctr"/>
           <a:lstStyle/>
           <a:p>
-            <a:pPr algn="ctr" indent="0" marL="0">
+            <a:pPr marL="0" indent="0" algn="ctr">
               <a:buNone/>
             </a:pPr>
             <a:r>
@@ -14720,6 +15096,13 @@
             <a:prstDash val="solid"/>
           </a:ln>
         </p:spPr>
+        <p:txBody>
+          <a:bodyPr/>
+          <a:lstStyle/>
+          <a:p>
+            <a:endParaRPr lang="en-US"/>
+          </a:p>
+        </p:txBody>
       </p:sp>
       <p:sp>
         <p:nvSpPr>
@@ -14742,7 +15125,7 @@
           <a:bodyPr wrap="square" lIns="0" tIns="0" rIns="0" bIns="0" rtlCol="0" anchor="ctr"/>
           <a:lstStyle/>
           <a:p>
-            <a:pPr indent="0" marL="0">
+            <a:pPr marL="0" indent="0">
               <a:buNone/>
             </a:pPr>
             <a:r>
@@ -14784,6 +15167,13 @@
             <a:prstDash val="solid"/>
           </a:ln>
         </p:spPr>
+        <p:txBody>
+          <a:bodyPr/>
+          <a:lstStyle/>
+          <a:p>
+            <a:endParaRPr lang="en-US"/>
+          </a:p>
+        </p:txBody>
       </p:sp>
       <p:sp>
         <p:nvSpPr>
@@ -14806,7 +15196,7 @@
           <a:bodyPr wrap="square" lIns="0" tIns="0" rIns="0" bIns="0" rtlCol="0" anchor="ctr"/>
           <a:lstStyle/>
           <a:p>
-            <a:pPr indent="0" marL="0">
+            <a:pPr marL="0" indent="0">
               <a:buNone/>
             </a:pPr>
             <a:r>
@@ -14848,6 +15238,13 @@
             <a:prstDash val="solid"/>
           </a:ln>
         </p:spPr>
+        <p:txBody>
+          <a:bodyPr/>
+          <a:lstStyle/>
+          <a:p>
+            <a:endParaRPr lang="en-US"/>
+          </a:p>
+        </p:txBody>
       </p:sp>
       <p:sp>
         <p:nvSpPr>
@@ -14870,7 +15267,7 @@
           <a:bodyPr wrap="square" lIns="0" tIns="0" rIns="0" bIns="0" rtlCol="0" anchor="ctr"/>
           <a:lstStyle/>
           <a:p>
-            <a:pPr indent="0" marL="0">
+            <a:pPr marL="0" indent="0">
               <a:buNone/>
             </a:pPr>
             <a:r>
@@ -14912,6 +15309,13 @@
             <a:prstDash val="solid"/>
           </a:ln>
         </p:spPr>
+        <p:txBody>
+          <a:bodyPr/>
+          <a:lstStyle/>
+          <a:p>
+            <a:endParaRPr lang="en-US"/>
+          </a:p>
+        </p:txBody>
       </p:sp>
       <p:sp>
         <p:nvSpPr>
@@ -14934,7 +15338,7 @@
           <a:bodyPr wrap="square" lIns="0" tIns="0" rIns="0" bIns="0" rtlCol="0" anchor="ctr"/>
           <a:lstStyle/>
           <a:p>
-            <a:pPr indent="0" marL="0">
+            <a:pPr marL="0" indent="0">
               <a:buNone/>
             </a:pPr>
             <a:r>
@@ -15253,4 +15657,319 @@
     </a:ext>
   </a:extLst>
 </a:theme>
+</file>
+
+<file path=ppt/theme/theme2.xml><?xml version="1.0" encoding="utf-8"?>
+<a:theme xmlns:a="http://schemas.openxmlformats.org/drawingml/2006/main" name="Office Theme">
+  <a:themeElements>
+    <a:clrScheme name="Office">
+      <a:dk1>
+        <a:sysClr val="windowText" lastClr="000000"/>
+      </a:dk1>
+      <a:lt1>
+        <a:sysClr val="window" lastClr="FFFFFF"/>
+      </a:lt1>
+      <a:dk2>
+        <a:srgbClr val="0E2841"/>
+      </a:dk2>
+      <a:lt2>
+        <a:srgbClr val="E8E8E8"/>
+      </a:lt2>
+      <a:accent1>
+        <a:srgbClr val="156082"/>
+      </a:accent1>
+      <a:accent2>
+        <a:srgbClr val="E97132"/>
+      </a:accent2>
+      <a:accent3>
+        <a:srgbClr val="196B24"/>
+      </a:accent3>
+      <a:accent4>
+        <a:srgbClr val="0F9ED5"/>
+      </a:accent4>
+      <a:accent5>
+        <a:srgbClr val="A02B93"/>
+      </a:accent5>
+      <a:accent6>
+        <a:srgbClr val="4EA72E"/>
+      </a:accent6>
+      <a:hlink>
+        <a:srgbClr val="467886"/>
+      </a:hlink>
+      <a:folHlink>
+        <a:srgbClr val="96607D"/>
+      </a:folHlink>
+    </a:clrScheme>
+    <a:fontScheme name="Office">
+      <a:majorFont>
+        <a:latin typeface="Aptos Display" panose="02110004020202020204"/>
+        <a:ea typeface=""/>
+        <a:cs typeface=""/>
+        <a:font script="Jpan" typeface="游ゴシック Light"/>
+        <a:font script="Hang" typeface="맑은 고딕"/>
+        <a:font script="Hans" typeface="等线 Light"/>
+        <a:font script="Hant" typeface="新細明體"/>
+        <a:font script="Arab" typeface="Times New Roman"/>
+        <a:font script="Hebr" typeface="Times New Roman"/>
+        <a:font script="Thai" typeface="Angsana New"/>
+        <a:font script="Ethi" typeface="Nyala"/>
+        <a:font script="Beng" typeface="Vrinda"/>
+        <a:font script="Gujr" typeface="Shruti"/>
+        <a:font script="Khmr" typeface="MoolBoran"/>
+        <a:font script="Knda" typeface="Tunga"/>
+        <a:font script="Guru" typeface="Raavi"/>
+        <a:font script="Cans" typeface="Euphemia"/>
+        <a:font script="Cher" typeface="Plantagenet Cherokee"/>
+        <a:font script="Yiii" typeface="Microsoft Yi Baiti"/>
+        <a:font script="Tibt" typeface="Microsoft Himalaya"/>
+        <a:font script="Thaa" typeface="MV Boli"/>
+        <a:font script="Deva" typeface="Mangal"/>
+        <a:font script="Telu" typeface="Gautami"/>
+        <a:font script="Taml" typeface="Latha"/>
+        <a:font script="Syrc" typeface="Estrangelo Edessa"/>
+        <a:font script="Orya" typeface="Kalinga"/>
+        <a:font script="Mlym" typeface="Kartika"/>
+        <a:font script="Laoo" typeface="DokChampa"/>
+        <a:font script="Sinh" typeface="Iskoola Pota"/>
+        <a:font script="Mong" typeface="Mongolian Baiti"/>
+        <a:font script="Viet" typeface="Times New Roman"/>
+        <a:font script="Uigh" typeface="Microsoft Uighur"/>
+        <a:font script="Geor" typeface="Sylfaen"/>
+        <a:font script="Armn" typeface="Arial"/>
+        <a:font script="Bugi" typeface="Leelawadee UI"/>
+        <a:font script="Bopo" typeface="Microsoft JhengHei"/>
+        <a:font script="Java" typeface="Javanese Text"/>
+        <a:font script="Lisu" typeface="Segoe UI"/>
+        <a:font script="Mymr" typeface="Myanmar Text"/>
+        <a:font script="Nkoo" typeface="Ebrima"/>
+        <a:font script="Olck" typeface="Nirmala UI"/>
+        <a:font script="Osma" typeface="Ebrima"/>
+        <a:font script="Phag" typeface="Phagspa"/>
+        <a:font script="Syrn" typeface="Estrangelo Edessa"/>
+        <a:font script="Syrj" typeface="Estrangelo Edessa"/>
+        <a:font script="Syre" typeface="Estrangelo Edessa"/>
+        <a:font script="Sora" typeface="Nirmala UI"/>
+        <a:font script="Tale" typeface="Microsoft Tai Le"/>
+        <a:font script="Talu" typeface="Microsoft New Tai Lue"/>
+        <a:font script="Tfng" typeface="Ebrima"/>
+      </a:majorFont>
+      <a:minorFont>
+        <a:latin typeface="Aptos" panose="02110004020202020204"/>
+        <a:ea typeface=""/>
+        <a:cs typeface=""/>
+        <a:font script="Jpan" typeface="游ゴシック"/>
+        <a:font script="Hang" typeface="맑은 고딕"/>
+        <a:font script="Hans" typeface="等线"/>
+        <a:font script="Hant" typeface="新細明體"/>
+        <a:font script="Arab" typeface="Arial"/>
+        <a:font script="Hebr" typeface="Arial"/>
+        <a:font script="Thai" typeface="Cordia New"/>
+        <a:font script="Ethi" typeface="Nyala"/>
+        <a:font script="Beng" typeface="Vrinda"/>
+        <a:font script="Gujr" typeface="Shruti"/>
+        <a:font script="Khmr" typeface="DaunPenh"/>
+        <a:font script="Knda" typeface="Tunga"/>
+        <a:font script="Guru" typeface="Raavi"/>
+        <a:font script="Cans" typeface="Euphemia"/>
+        <a:font script="Cher" typeface="Plantagenet Cherokee"/>
+        <a:font script="Yiii" typeface="Microsoft Yi Baiti"/>
+        <a:font script="Tibt" typeface="Microsoft Himalaya"/>
+        <a:font script="Thaa" typeface="MV Boli"/>
+        <a:font script="Deva" typeface="Mangal"/>
+        <a:font script="Telu" typeface="Gautami"/>
+        <a:font script="Taml" typeface="Latha"/>
+        <a:font script="Syrc" typeface="Estrangelo Edessa"/>
+        <a:font script="Orya" typeface="Kalinga"/>
+        <a:font script="Mlym" typeface="Kartika"/>
+        <a:font script="Laoo" typeface="DokChampa"/>
+        <a:font script="Sinh" typeface="Iskoola Pota"/>
+        <a:font script="Mong" typeface="Mongolian Baiti"/>
+        <a:font script="Viet" typeface="Arial"/>
+        <a:font script="Uigh" typeface="Microsoft Uighur"/>
+        <a:font script="Geor" typeface="Sylfaen"/>
+        <a:font script="Armn" typeface="Arial"/>
+        <a:font script="Bugi" typeface="Leelawadee UI"/>
+        <a:font script="Bopo" typeface="Microsoft JhengHei"/>
+        <a:font script="Java" typeface="Javanese Text"/>
+        <a:font script="Lisu" typeface="Segoe UI"/>
+        <a:font script="Mymr" typeface="Myanmar Text"/>
+        <a:font script="Nkoo" typeface="Ebrima"/>
+        <a:font script="Olck" typeface="Nirmala UI"/>
+        <a:font script="Osma" typeface="Ebrima"/>
+        <a:font script="Phag" typeface="Phagspa"/>
+        <a:font script="Syrn" typeface="Estrangelo Edessa"/>
+        <a:font script="Syrj" typeface="Estrangelo Edessa"/>
+        <a:font script="Syre" typeface="Estrangelo Edessa"/>
+        <a:font script="Sora" typeface="Nirmala UI"/>
+        <a:font script="Tale" typeface="Microsoft Tai Le"/>
+        <a:font script="Talu" typeface="Microsoft New Tai Lue"/>
+        <a:font script="Tfng" typeface="Ebrima"/>
+      </a:minorFont>
+    </a:fontScheme>
+    <a:fmtScheme name="Office">
+      <a:fillStyleLst>
+        <a:solidFill>
+          <a:schemeClr val="phClr"/>
+        </a:solidFill>
+        <a:gradFill rotWithShape="1">
+          <a:gsLst>
+            <a:gs pos="0">
+              <a:schemeClr val="phClr">
+                <a:lumMod val="110000"/>
+                <a:satMod val="105000"/>
+                <a:tint val="67000"/>
+              </a:schemeClr>
+            </a:gs>
+            <a:gs pos="50000">
+              <a:schemeClr val="phClr">
+                <a:lumMod val="105000"/>
+                <a:satMod val="103000"/>
+                <a:tint val="73000"/>
+              </a:schemeClr>
+            </a:gs>
+            <a:gs pos="100000">
+              <a:schemeClr val="phClr">
+                <a:lumMod val="105000"/>
+                <a:satMod val="109000"/>
+                <a:tint val="81000"/>
+              </a:schemeClr>
+            </a:gs>
+          </a:gsLst>
+          <a:lin ang="5400000" scaled="0"/>
+        </a:gradFill>
+        <a:gradFill rotWithShape="1">
+          <a:gsLst>
+            <a:gs pos="0">
+              <a:schemeClr val="phClr">
+                <a:satMod val="103000"/>
+                <a:lumMod val="102000"/>
+                <a:tint val="94000"/>
+              </a:schemeClr>
+            </a:gs>
+            <a:gs pos="50000">
+              <a:schemeClr val="phClr">
+                <a:satMod val="110000"/>
+                <a:lumMod val="100000"/>
+                <a:shade val="100000"/>
+              </a:schemeClr>
+            </a:gs>
+            <a:gs pos="100000">
+              <a:schemeClr val="phClr">
+                <a:lumMod val="99000"/>
+                <a:satMod val="120000"/>
+                <a:shade val="78000"/>
+              </a:schemeClr>
+            </a:gs>
+          </a:gsLst>
+          <a:lin ang="5400000" scaled="0"/>
+        </a:gradFill>
+      </a:fillStyleLst>
+      <a:lnStyleLst>
+        <a:ln w="12700" cap="flat" cmpd="sng" algn="ctr">
+          <a:solidFill>
+            <a:schemeClr val="phClr"/>
+          </a:solidFill>
+          <a:prstDash val="solid"/>
+          <a:miter lim="800000"/>
+        </a:ln>
+        <a:ln w="19050" cap="flat" cmpd="sng" algn="ctr">
+          <a:solidFill>
+            <a:schemeClr val="phClr"/>
+          </a:solidFill>
+          <a:prstDash val="solid"/>
+          <a:miter lim="800000"/>
+        </a:ln>
+        <a:ln w="25400" cap="flat" cmpd="sng" algn="ctr">
+          <a:solidFill>
+            <a:schemeClr val="phClr"/>
+          </a:solidFill>
+          <a:prstDash val="solid"/>
+          <a:miter lim="800000"/>
+        </a:ln>
+      </a:lnStyleLst>
+      <a:effectStyleLst>
+        <a:effectStyle>
+          <a:effectLst/>
+        </a:effectStyle>
+        <a:effectStyle>
+          <a:effectLst/>
+        </a:effectStyle>
+        <a:effectStyle>
+          <a:effectLst>
+            <a:outerShdw blurRad="57150" dist="19050" dir="5400000" algn="ctr" rotWithShape="0">
+              <a:srgbClr val="000000">
+                <a:alpha val="63000"/>
+              </a:srgbClr>
+            </a:outerShdw>
+          </a:effectLst>
+        </a:effectStyle>
+      </a:effectStyleLst>
+      <a:bgFillStyleLst>
+        <a:solidFill>
+          <a:schemeClr val="phClr"/>
+        </a:solidFill>
+        <a:solidFill>
+          <a:schemeClr val="phClr">
+            <a:tint val="95000"/>
+            <a:satMod val="170000"/>
+          </a:schemeClr>
+        </a:solidFill>
+        <a:gradFill rotWithShape="1">
+          <a:gsLst>
+            <a:gs pos="0">
+              <a:schemeClr val="phClr">
+                <a:tint val="93000"/>
+                <a:satMod val="150000"/>
+                <a:shade val="98000"/>
+                <a:lumMod val="102000"/>
+              </a:schemeClr>
+            </a:gs>
+            <a:gs pos="50000">
+              <a:schemeClr val="phClr">
+                <a:tint val="98000"/>
+                <a:satMod val="130000"/>
+                <a:shade val="90000"/>
+                <a:lumMod val="103000"/>
+              </a:schemeClr>
+            </a:gs>
+            <a:gs pos="100000">
+              <a:schemeClr val="phClr">
+                <a:shade val="63000"/>
+                <a:satMod val="120000"/>
+              </a:schemeClr>
+            </a:gs>
+          </a:gsLst>
+          <a:lin ang="5400000" scaled="0"/>
+        </a:gradFill>
+      </a:bgFillStyleLst>
+    </a:fmtScheme>
+  </a:themeElements>
+  <a:objectDefaults>
+    <a:lnDef>
+      <a:spPr/>
+      <a:bodyPr/>
+      <a:lstStyle/>
+      <a:style>
+        <a:lnRef idx="2">
+          <a:schemeClr val="accent1"/>
+        </a:lnRef>
+        <a:fillRef idx="0">
+          <a:schemeClr val="accent1"/>
+        </a:fillRef>
+        <a:effectRef idx="1">
+          <a:schemeClr val="accent1"/>
+        </a:effectRef>
+        <a:fontRef idx="minor">
+          <a:schemeClr val="tx1"/>
+        </a:fontRef>
+      </a:style>
+    </a:lnDef>
+  </a:objectDefaults>
+  <a:extraClrSchemeLst/>
+  <a:extLst>
+    <a:ext uri="{05A4C25C-085E-4340-85A3-A5531E510DB2}">
+      <thm15:themeFamily xmlns:thm15="http://schemas.microsoft.com/office/thememl/2012/main" name="Office Theme" id="{2E142A2C-CD16-42D6-873A-C26D2A0506FA}" vid="{1BDDFF52-6CD6-40A5-AB3C-68EB2F1E4D0A}"/>
+    </a:ext>
+  </a:extLst>
+</a:theme>
 </file>